--- a/docs/pptx/auc3/ritu-auc3-linsubhr-dosedisc-throm2.pptx
+++ b/docs/pptx/auc3/ritu-auc3-linsubhr-dosedisc-throm2.pptx
@@ -2443,7 +2443,7 @@
           </p:nvSpPr>
           <p:spPr>
             <a:xfrm>
-              <a:off x="980186" y="1896563"/>
+              <a:off x="980739" y="1896563"/>
               <a:ext cx="0" cy="3826579"/>
             </a:xfrm>
             <a:custGeom>
@@ -2486,7 +2486,7 @@
           </p:nvSpPr>
           <p:spPr>
             <a:xfrm>
-              <a:off x="3262630" y="1896563"/>
+              <a:off x="3260798" y="1896563"/>
               <a:ext cx="0" cy="3826579"/>
             </a:xfrm>
             <a:custGeom>
@@ -2529,7 +2529,7 @@
           </p:nvSpPr>
           <p:spPr>
             <a:xfrm>
-              <a:off x="5545073" y="1896563"/>
+              <a:off x="5540858" y="1896563"/>
               <a:ext cx="0" cy="3826579"/>
             </a:xfrm>
             <a:custGeom>
@@ -2572,7 +2572,7 @@
           </p:nvSpPr>
           <p:spPr>
             <a:xfrm>
-              <a:off x="7827517" y="1896563"/>
+              <a:off x="7820918" y="1896563"/>
               <a:ext cx="0" cy="3826579"/>
             </a:xfrm>
             <a:custGeom>
@@ -2830,7 +2830,7 @@
           </p:nvSpPr>
           <p:spPr>
             <a:xfrm>
-              <a:off x="2121408" y="1896563"/>
+              <a:off x="2120768" y="1896563"/>
               <a:ext cx="0" cy="3826579"/>
             </a:xfrm>
             <a:custGeom>
@@ -2873,7 +2873,7 @@
           </p:nvSpPr>
           <p:spPr>
             <a:xfrm>
-              <a:off x="4403852" y="1896563"/>
+              <a:off x="4400828" y="1896563"/>
               <a:ext cx="0" cy="3826579"/>
             </a:xfrm>
             <a:custGeom>
@@ -2916,7 +2916,7 @@
           </p:nvSpPr>
           <p:spPr>
             <a:xfrm>
-              <a:off x="6686295" y="1896563"/>
+              <a:off x="6680888" y="1896563"/>
               <a:ext cx="0" cy="3826579"/>
             </a:xfrm>
             <a:custGeom>
@@ -2960,542 +2960,539 @@
           <p:spPr>
             <a:xfrm>
               <a:off x="1172049" y="1896563"/>
-              <a:ext cx="7090630" cy="3572235"/>
+              <a:ext cx="7090630" cy="3574401"/>
             </a:xfrm>
             <a:custGeom>
               <a:avLst/>
               <a:pathLst>
-                <a:path w="7090630" h="3572235">
+                <a:path w="7090630" h="3574401">
                   <a:moveTo>
-                    <a:pt x="859030" y="0"/>
+                    <a:pt x="821380" y="0"/>
                   </a:moveTo>
                   <a:lnTo>
-                    <a:pt x="859470" y="1004"/>
-                  </a:lnTo>
-                  <a:lnTo>
-                    <a:pt x="931092" y="157703"/>
-                  </a:lnTo>
-                  <a:lnTo>
-                    <a:pt x="1002715" y="307678"/>
-                  </a:lnTo>
-                  <a:lnTo>
-                    <a:pt x="1074337" y="451218"/>
-                  </a:lnTo>
-                  <a:lnTo>
-                    <a:pt x="1145960" y="588597"/>
-                  </a:lnTo>
-                  <a:lnTo>
-                    <a:pt x="1217582" y="720082"/>
-                  </a:lnTo>
-                  <a:lnTo>
-                    <a:pt x="1289205" y="845924"/>
-                  </a:lnTo>
-                  <a:lnTo>
-                    <a:pt x="1360827" y="966366"/>
-                  </a:lnTo>
-                  <a:lnTo>
-                    <a:pt x="1432450" y="1081640"/>
-                  </a:lnTo>
-                  <a:lnTo>
-                    <a:pt x="1504073" y="1191967"/>
-                  </a:lnTo>
-                  <a:lnTo>
-                    <a:pt x="1575695" y="1297559"/>
-                  </a:lnTo>
-                  <a:lnTo>
-                    <a:pt x="1647318" y="1398621"/>
-                  </a:lnTo>
-                  <a:lnTo>
-                    <a:pt x="1718940" y="1495346"/>
-                  </a:lnTo>
-                  <a:lnTo>
-                    <a:pt x="1790563" y="1587920"/>
-                  </a:lnTo>
-                  <a:lnTo>
-                    <a:pt x="1862185" y="1676521"/>
-                  </a:lnTo>
-                  <a:lnTo>
-                    <a:pt x="1933808" y="1761321"/>
-                  </a:lnTo>
-                  <a:lnTo>
-                    <a:pt x="2005430" y="1842481"/>
-                  </a:lnTo>
-                  <a:lnTo>
-                    <a:pt x="2077053" y="1920159"/>
-                  </a:lnTo>
-                  <a:lnTo>
-                    <a:pt x="2148675" y="1994503"/>
-                  </a:lnTo>
-                  <a:lnTo>
-                    <a:pt x="2220298" y="2065658"/>
-                  </a:lnTo>
-                  <a:lnTo>
-                    <a:pt x="2291920" y="2133758"/>
-                  </a:lnTo>
-                  <a:lnTo>
-                    <a:pt x="2363543" y="2198937"/>
-                  </a:lnTo>
-                  <a:lnTo>
-                    <a:pt x="2435165" y="2261318"/>
-                  </a:lnTo>
-                  <a:lnTo>
-                    <a:pt x="2506788" y="2321023"/>
-                  </a:lnTo>
-                  <a:lnTo>
-                    <a:pt x="2578410" y="2378165"/>
-                  </a:lnTo>
-                  <a:lnTo>
-                    <a:pt x="2650033" y="2432856"/>
-                  </a:lnTo>
-                  <a:lnTo>
-                    <a:pt x="2721655" y="2485199"/>
-                  </a:lnTo>
-                  <a:lnTo>
-                    <a:pt x="2793278" y="2535297"/>
-                  </a:lnTo>
-                  <a:lnTo>
-                    <a:pt x="2864901" y="2583244"/>
-                  </a:lnTo>
-                  <a:lnTo>
-                    <a:pt x="2936523" y="2629135"/>
-                  </a:lnTo>
-                  <a:lnTo>
-                    <a:pt x="3008146" y="2673055"/>
-                  </a:lnTo>
-                  <a:lnTo>
-                    <a:pt x="3079768" y="2715092"/>
-                  </a:lnTo>
-                  <a:lnTo>
-                    <a:pt x="3151391" y="2755324"/>
-                  </a:lnTo>
-                  <a:lnTo>
-                    <a:pt x="3223013" y="2774076"/>
-                  </a:lnTo>
-                  <a:lnTo>
-                    <a:pt x="3294636" y="2742338"/>
-                  </a:lnTo>
-                  <a:lnTo>
-                    <a:pt x="3366258" y="2709453"/>
-                  </a:lnTo>
-                  <a:lnTo>
-                    <a:pt x="3437881" y="2675381"/>
-                  </a:lnTo>
-                  <a:lnTo>
-                    <a:pt x="3509503" y="2640077"/>
-                  </a:lnTo>
-                  <a:lnTo>
-                    <a:pt x="3581126" y="2603499"/>
-                  </a:lnTo>
-                  <a:lnTo>
-                    <a:pt x="3652748" y="2565598"/>
-                  </a:lnTo>
-                  <a:lnTo>
-                    <a:pt x="3724371" y="2526329"/>
-                  </a:lnTo>
-                  <a:lnTo>
-                    <a:pt x="3795993" y="2485641"/>
-                  </a:lnTo>
-                  <a:lnTo>
-                    <a:pt x="3867616" y="2443483"/>
-                  </a:lnTo>
-                  <a:lnTo>
-                    <a:pt x="3939238" y="2399803"/>
-                  </a:lnTo>
-                  <a:lnTo>
-                    <a:pt x="4010861" y="2354544"/>
-                  </a:lnTo>
-                  <a:lnTo>
-                    <a:pt x="4082483" y="2307651"/>
-                  </a:lnTo>
-                  <a:lnTo>
-                    <a:pt x="4154106" y="2259063"/>
-                  </a:lnTo>
-                  <a:lnTo>
-                    <a:pt x="4225729" y="2208720"/>
-                  </a:lnTo>
-                  <a:lnTo>
-                    <a:pt x="4297351" y="2156559"/>
-                  </a:lnTo>
-                  <a:lnTo>
-                    <a:pt x="4368974" y="2102513"/>
-                  </a:lnTo>
-                  <a:lnTo>
-                    <a:pt x="4440596" y="2046515"/>
-                  </a:lnTo>
-                  <a:lnTo>
-                    <a:pt x="4512219" y="1988494"/>
-                  </a:lnTo>
-                  <a:lnTo>
-                    <a:pt x="4583841" y="1928376"/>
-                  </a:lnTo>
-                  <a:lnTo>
-                    <a:pt x="4655464" y="1866088"/>
-                  </a:lnTo>
-                  <a:lnTo>
-                    <a:pt x="4727086" y="1801549"/>
-                  </a:lnTo>
-                  <a:lnTo>
-                    <a:pt x="4798709" y="1734678"/>
-                  </a:lnTo>
-                  <a:lnTo>
-                    <a:pt x="4870331" y="1665392"/>
-                  </a:lnTo>
-                  <a:lnTo>
-                    <a:pt x="4941954" y="1593603"/>
-                  </a:lnTo>
-                  <a:lnTo>
-                    <a:pt x="5013576" y="1519221"/>
-                  </a:lnTo>
-                  <a:lnTo>
-                    <a:pt x="5085199" y="1442151"/>
-                  </a:lnTo>
-                  <a:lnTo>
-                    <a:pt x="5156821" y="1362297"/>
-                  </a:lnTo>
-                  <a:lnTo>
-                    <a:pt x="5228444" y="1279559"/>
-                  </a:lnTo>
-                  <a:lnTo>
-                    <a:pt x="5300066" y="1193832"/>
-                  </a:lnTo>
-                  <a:lnTo>
-                    <a:pt x="5371689" y="1105008"/>
-                  </a:lnTo>
-                  <a:lnTo>
-                    <a:pt x="5443311" y="1012975"/>
-                  </a:lnTo>
-                  <a:lnTo>
-                    <a:pt x="5514934" y="917617"/>
-                  </a:lnTo>
-                  <a:lnTo>
-                    <a:pt x="5586557" y="818815"/>
-                  </a:lnTo>
-                  <a:lnTo>
-                    <a:pt x="5658179" y="716444"/>
-                  </a:lnTo>
-                  <a:lnTo>
-                    <a:pt x="5729802" y="610374"/>
-                  </a:lnTo>
-                  <a:lnTo>
-                    <a:pt x="5801424" y="500472"/>
-                  </a:lnTo>
-                  <a:lnTo>
-                    <a:pt x="5873047" y="386601"/>
-                  </a:lnTo>
-                  <a:lnTo>
-                    <a:pt x="5944669" y="268616"/>
-                  </a:lnTo>
-                  <a:lnTo>
-                    <a:pt x="6016292" y="146368"/>
-                  </a:lnTo>
-                  <a:lnTo>
-                    <a:pt x="6087914" y="19705"/>
-                  </a:lnTo>
-                  <a:lnTo>
-                    <a:pt x="6098668" y="0"/>
+                    <a:pt x="859470" y="85156"/>
+                  </a:lnTo>
+                  <a:lnTo>
+                    <a:pt x="931092" y="238401"/>
+                  </a:lnTo>
+                  <a:lnTo>
+                    <a:pt x="1002715" y="385062"/>
+                  </a:lnTo>
+                  <a:lnTo>
+                    <a:pt x="1074337" y="525424"/>
+                  </a:lnTo>
+                  <a:lnTo>
+                    <a:pt x="1145960" y="659757"/>
+                  </a:lnTo>
+                  <a:lnTo>
+                    <a:pt x="1217582" y="788319"/>
+                  </a:lnTo>
+                  <a:lnTo>
+                    <a:pt x="1289205" y="911359"/>
+                  </a:lnTo>
+                  <a:lnTo>
+                    <a:pt x="1360827" y="1029113"/>
+                  </a:lnTo>
+                  <a:lnTo>
+                    <a:pt x="1432450" y="1141810"/>
+                  </a:lnTo>
+                  <a:lnTo>
+                    <a:pt x="1504073" y="1249665"/>
+                  </a:lnTo>
+                  <a:lnTo>
+                    <a:pt x="1575695" y="1352887"/>
+                  </a:lnTo>
+                  <a:lnTo>
+                    <a:pt x="1647318" y="1451675"/>
+                  </a:lnTo>
+                  <a:lnTo>
+                    <a:pt x="1718940" y="1546220"/>
+                  </a:lnTo>
+                  <a:lnTo>
+                    <a:pt x="1790563" y="1636703"/>
+                  </a:lnTo>
+                  <a:lnTo>
+                    <a:pt x="1862185" y="1723300"/>
+                  </a:lnTo>
+                  <a:lnTo>
+                    <a:pt x="1933808" y="1806176"/>
+                  </a:lnTo>
+                  <a:lnTo>
+                    <a:pt x="2005430" y="1885493"/>
+                  </a:lnTo>
+                  <a:lnTo>
+                    <a:pt x="2077053" y="1961403"/>
+                  </a:lnTo>
+                  <a:lnTo>
+                    <a:pt x="2148675" y="2034051"/>
+                  </a:lnTo>
+                  <a:lnTo>
+                    <a:pt x="2220298" y="2103580"/>
+                  </a:lnTo>
+                  <a:lnTo>
+                    <a:pt x="2291920" y="2170121"/>
+                  </a:lnTo>
+                  <a:lnTo>
+                    <a:pt x="2363543" y="2233804"/>
+                  </a:lnTo>
+                  <a:lnTo>
+                    <a:pt x="2435165" y="2294752"/>
+                  </a:lnTo>
+                  <a:lnTo>
+                    <a:pt x="2506788" y="2353081"/>
+                  </a:lnTo>
+                  <a:lnTo>
+                    <a:pt x="2578410" y="2408905"/>
+                  </a:lnTo>
+                  <a:lnTo>
+                    <a:pt x="2650033" y="2462331"/>
+                  </a:lnTo>
+                  <a:lnTo>
+                    <a:pt x="2721655" y="2513462"/>
+                  </a:lnTo>
+                  <a:lnTo>
+                    <a:pt x="2793278" y="2562397"/>
+                  </a:lnTo>
+                  <a:lnTo>
+                    <a:pt x="2864901" y="2609229"/>
+                  </a:lnTo>
+                  <a:lnTo>
+                    <a:pt x="2936523" y="2654050"/>
+                  </a:lnTo>
+                  <a:lnTo>
+                    <a:pt x="3008146" y="2696946"/>
+                  </a:lnTo>
+                  <a:lnTo>
+                    <a:pt x="3079768" y="2737998"/>
+                  </a:lnTo>
+                  <a:lnTo>
+                    <a:pt x="3151391" y="2777288"/>
+                  </a:lnTo>
+                  <a:lnTo>
+                    <a:pt x="3223013" y="2756249"/>
+                  </a:lnTo>
+                  <a:lnTo>
+                    <a:pt x="3294636" y="2723832"/>
+                  </a:lnTo>
+                  <a:lnTo>
+                    <a:pt x="3366258" y="2690243"/>
+                  </a:lnTo>
+                  <a:lnTo>
+                    <a:pt x="3437881" y="2655440"/>
+                  </a:lnTo>
+                  <a:lnTo>
+                    <a:pt x="3509503" y="2619377"/>
+                  </a:lnTo>
+                  <a:lnTo>
+                    <a:pt x="3581126" y="2582011"/>
+                  </a:lnTo>
+                  <a:lnTo>
+                    <a:pt x="3652748" y="2543294"/>
+                  </a:lnTo>
+                  <a:lnTo>
+                    <a:pt x="3724371" y="2503176"/>
+                  </a:lnTo>
+                  <a:lnTo>
+                    <a:pt x="3795993" y="2461607"/>
+                  </a:lnTo>
+                  <a:lnTo>
+                    <a:pt x="3867616" y="2418536"/>
+                  </a:lnTo>
+                  <a:lnTo>
+                    <a:pt x="3939238" y="2373906"/>
+                  </a:lnTo>
+                  <a:lnTo>
+                    <a:pt x="4010861" y="2327663"/>
+                  </a:lnTo>
+                  <a:lnTo>
+                    <a:pt x="4082483" y="2279747"/>
+                  </a:lnTo>
+                  <a:lnTo>
+                    <a:pt x="4154106" y="2230099"/>
+                  </a:lnTo>
+                  <a:lnTo>
+                    <a:pt x="4225729" y="2178655"/>
+                  </a:lnTo>
+                  <a:lnTo>
+                    <a:pt x="4297351" y="2125351"/>
+                  </a:lnTo>
+                  <a:lnTo>
+                    <a:pt x="4368974" y="2070119"/>
+                  </a:lnTo>
+                  <a:lnTo>
+                    <a:pt x="4440596" y="2012890"/>
+                  </a:lnTo>
+                  <a:lnTo>
+                    <a:pt x="4512219" y="1953591"/>
+                  </a:lnTo>
+                  <a:lnTo>
+                    <a:pt x="4583841" y="1892148"/>
+                  </a:lnTo>
+                  <a:lnTo>
+                    <a:pt x="4655464" y="1828482"/>
+                  </a:lnTo>
+                  <a:lnTo>
+                    <a:pt x="4727086" y="1762515"/>
+                  </a:lnTo>
+                  <a:lnTo>
+                    <a:pt x="4798709" y="1694162"/>
+                  </a:lnTo>
+                  <a:lnTo>
+                    <a:pt x="4870331" y="1623336"/>
+                  </a:lnTo>
+                  <a:lnTo>
+                    <a:pt x="4941954" y="1549950"/>
+                  </a:lnTo>
+                  <a:lnTo>
+                    <a:pt x="5013576" y="1473910"/>
+                  </a:lnTo>
+                  <a:lnTo>
+                    <a:pt x="5085199" y="1395120"/>
+                  </a:lnTo>
+                  <a:lnTo>
+                    <a:pt x="5156821" y="1313480"/>
+                  </a:lnTo>
+                  <a:lnTo>
+                    <a:pt x="5228444" y="1228889"/>
+                  </a:lnTo>
+                  <a:lnTo>
+                    <a:pt x="5300066" y="1141238"/>
+                  </a:lnTo>
+                  <a:lnTo>
+                    <a:pt x="5371689" y="1050417"/>
+                  </a:lnTo>
+                  <a:lnTo>
+                    <a:pt x="5443311" y="956312"/>
+                  </a:lnTo>
+                  <a:lnTo>
+                    <a:pt x="5514934" y="858804"/>
+                  </a:lnTo>
+                  <a:lnTo>
+                    <a:pt x="5586557" y="757769"/>
+                  </a:lnTo>
+                  <a:lnTo>
+                    <a:pt x="5658179" y="653081"/>
+                  </a:lnTo>
+                  <a:lnTo>
+                    <a:pt x="5729802" y="544607"/>
+                  </a:lnTo>
+                  <a:lnTo>
+                    <a:pt x="5801424" y="432211"/>
+                  </a:lnTo>
+                  <a:lnTo>
+                    <a:pt x="5873047" y="315749"/>
+                  </a:lnTo>
+                  <a:lnTo>
+                    <a:pt x="5944669" y="195076"/>
+                  </a:lnTo>
+                  <a:lnTo>
+                    <a:pt x="6016292" y="70039"/>
+                  </a:lnTo>
+                  <a:lnTo>
+                    <a:pt x="6055011" y="0"/>
                   </a:lnTo>
                   <a:lnTo>
                     <a:pt x="7090630" y="0"/>
                   </a:lnTo>
                   <a:lnTo>
-                    <a:pt x="7090630" y="3572235"/>
-                  </a:lnTo>
-                  <a:lnTo>
-                    <a:pt x="7019007" y="3568630"/>
-                  </a:lnTo>
-                  <a:lnTo>
-                    <a:pt x="6947385" y="3564863"/>
-                  </a:lnTo>
-                  <a:lnTo>
-                    <a:pt x="6875762" y="3560928"/>
-                  </a:lnTo>
-                  <a:lnTo>
-                    <a:pt x="6804139" y="3556815"/>
-                  </a:lnTo>
-                  <a:lnTo>
-                    <a:pt x="6732517" y="3552519"/>
-                  </a:lnTo>
-                  <a:lnTo>
-                    <a:pt x="6660894" y="3548030"/>
-                  </a:lnTo>
-                  <a:lnTo>
-                    <a:pt x="6589272" y="3543339"/>
-                  </a:lnTo>
-                  <a:lnTo>
-                    <a:pt x="6517649" y="3538439"/>
-                  </a:lnTo>
-                  <a:lnTo>
-                    <a:pt x="6446027" y="3533318"/>
-                  </a:lnTo>
-                  <a:lnTo>
-                    <a:pt x="6374404" y="3527968"/>
-                  </a:lnTo>
-                  <a:lnTo>
-                    <a:pt x="6302782" y="3522378"/>
-                  </a:lnTo>
-                  <a:lnTo>
-                    <a:pt x="6231159" y="3516537"/>
-                  </a:lnTo>
-                  <a:lnTo>
-                    <a:pt x="6159537" y="3510435"/>
-                  </a:lnTo>
-                  <a:lnTo>
-                    <a:pt x="6087914" y="3504059"/>
-                  </a:lnTo>
-                  <a:lnTo>
-                    <a:pt x="6016292" y="3497397"/>
-                  </a:lnTo>
-                  <a:lnTo>
-                    <a:pt x="5944669" y="3490436"/>
-                  </a:lnTo>
-                  <a:lnTo>
-                    <a:pt x="5873047" y="3483164"/>
-                  </a:lnTo>
-                  <a:lnTo>
-                    <a:pt x="5801424" y="3475565"/>
-                  </a:lnTo>
-                  <a:lnTo>
-                    <a:pt x="5729802" y="3467625"/>
-                  </a:lnTo>
-                  <a:lnTo>
-                    <a:pt x="5658179" y="3459330"/>
-                  </a:lnTo>
-                  <a:lnTo>
-                    <a:pt x="5586557" y="3450663"/>
-                  </a:lnTo>
-                  <a:lnTo>
-                    <a:pt x="5514934" y="3441606"/>
-                  </a:lnTo>
-                  <a:lnTo>
-                    <a:pt x="5443311" y="3432144"/>
-                  </a:lnTo>
-                  <a:lnTo>
-                    <a:pt x="5371689" y="3422258"/>
-                  </a:lnTo>
-                  <a:lnTo>
-                    <a:pt x="5300066" y="3411929"/>
-                  </a:lnTo>
-                  <a:lnTo>
-                    <a:pt x="5228444" y="3401136"/>
-                  </a:lnTo>
-                  <a:lnTo>
-                    <a:pt x="5156821" y="3389859"/>
-                  </a:lnTo>
-                  <a:lnTo>
-                    <a:pt x="5085199" y="3378077"/>
-                  </a:lnTo>
-                  <a:lnTo>
-                    <a:pt x="5013576" y="3365767"/>
-                  </a:lnTo>
-                  <a:lnTo>
-                    <a:pt x="4941954" y="3352904"/>
-                  </a:lnTo>
-                  <a:lnTo>
-                    <a:pt x="4870331" y="3339465"/>
-                  </a:lnTo>
-                  <a:lnTo>
-                    <a:pt x="4798709" y="3325423"/>
-                  </a:lnTo>
-                  <a:lnTo>
-                    <a:pt x="4727086" y="3310752"/>
-                  </a:lnTo>
-                  <a:lnTo>
-                    <a:pt x="4655464" y="3295423"/>
-                  </a:lnTo>
-                  <a:lnTo>
-                    <a:pt x="4583841" y="3279407"/>
-                  </a:lnTo>
-                  <a:lnTo>
-                    <a:pt x="4512219" y="3262672"/>
-                  </a:lnTo>
-                  <a:lnTo>
-                    <a:pt x="4440596" y="3245188"/>
-                  </a:lnTo>
-                  <a:lnTo>
-                    <a:pt x="4368974" y="3226919"/>
-                  </a:lnTo>
-                  <a:lnTo>
-                    <a:pt x="4297351" y="3207831"/>
-                  </a:lnTo>
-                  <a:lnTo>
-                    <a:pt x="4225729" y="3187887"/>
-                  </a:lnTo>
-                  <a:lnTo>
-                    <a:pt x="4154106" y="3167050"/>
-                  </a:lnTo>
-                  <a:lnTo>
-                    <a:pt x="4082483" y="3145278"/>
-                  </a:lnTo>
-                  <a:lnTo>
-                    <a:pt x="4010861" y="3122529"/>
-                  </a:lnTo>
-                  <a:lnTo>
-                    <a:pt x="3939238" y="3098761"/>
-                  </a:lnTo>
-                  <a:lnTo>
-                    <a:pt x="3867616" y="3073927"/>
-                  </a:lnTo>
-                  <a:lnTo>
-                    <a:pt x="3795993" y="3047980"/>
-                  </a:lnTo>
-                  <a:lnTo>
-                    <a:pt x="3724371" y="3020869"/>
-                  </a:lnTo>
-                  <a:lnTo>
-                    <a:pt x="3652748" y="2992543"/>
-                  </a:lnTo>
-                  <a:lnTo>
-                    <a:pt x="3581126" y="2962946"/>
-                  </a:lnTo>
-                  <a:lnTo>
-                    <a:pt x="3509503" y="2932023"/>
-                  </a:lnTo>
-                  <a:lnTo>
-                    <a:pt x="3437881" y="2899713"/>
-                  </a:lnTo>
-                  <a:lnTo>
-                    <a:pt x="3366258" y="2865955"/>
-                  </a:lnTo>
-                  <a:lnTo>
-                    <a:pt x="3294636" y="2830683"/>
-                  </a:lnTo>
-                  <a:lnTo>
-                    <a:pt x="3223013" y="2793830"/>
-                  </a:lnTo>
-                  <a:lnTo>
-                    <a:pt x="3151391" y="2804708"/>
-                  </a:lnTo>
-                  <a:lnTo>
-                    <a:pt x="3079768" y="2834271"/>
-                  </a:lnTo>
-                  <a:lnTo>
-                    <a:pt x="3008146" y="2862804"/>
-                  </a:lnTo>
-                  <a:lnTo>
-                    <a:pt x="2936523" y="2890342"/>
-                  </a:lnTo>
-                  <a:lnTo>
-                    <a:pt x="2864901" y="2916920"/>
-                  </a:lnTo>
-                  <a:lnTo>
-                    <a:pt x="2793278" y="2942571"/>
-                  </a:lnTo>
-                  <a:lnTo>
-                    <a:pt x="2721655" y="2967328"/>
-                  </a:lnTo>
-                  <a:lnTo>
-                    <a:pt x="2650033" y="2991222"/>
-                  </a:lnTo>
-                  <a:lnTo>
-                    <a:pt x="2578410" y="3014282"/>
-                  </a:lnTo>
-                  <a:lnTo>
-                    <a:pt x="2506788" y="3036539"/>
-                  </a:lnTo>
-                  <a:lnTo>
-                    <a:pt x="2435165" y="3058020"/>
-                  </a:lnTo>
-                  <a:lnTo>
-                    <a:pt x="2363543" y="3078751"/>
-                  </a:lnTo>
-                  <a:lnTo>
-                    <a:pt x="2291920" y="3098760"/>
-                  </a:lnTo>
-                  <a:lnTo>
-                    <a:pt x="2220298" y="3118072"/>
-                  </a:lnTo>
-                  <a:lnTo>
-                    <a:pt x="2148675" y="3136710"/>
-                  </a:lnTo>
-                  <a:lnTo>
-                    <a:pt x="2077053" y="3154698"/>
-                  </a:lnTo>
-                  <a:lnTo>
-                    <a:pt x="2005430" y="3172059"/>
-                  </a:lnTo>
-                  <a:lnTo>
-                    <a:pt x="1933808" y="3188815"/>
-                  </a:lnTo>
-                  <a:lnTo>
-                    <a:pt x="1862185" y="3204986"/>
-                  </a:lnTo>
-                  <a:lnTo>
-                    <a:pt x="1790563" y="3220594"/>
-                  </a:lnTo>
-                  <a:lnTo>
-                    <a:pt x="1718940" y="3235657"/>
-                  </a:lnTo>
-                  <a:lnTo>
-                    <a:pt x="1647318" y="3250196"/>
-                  </a:lnTo>
-                  <a:lnTo>
-                    <a:pt x="1575695" y="3264227"/>
-                  </a:lnTo>
-                  <a:lnTo>
-                    <a:pt x="1504073" y="3277769"/>
-                  </a:lnTo>
-                  <a:lnTo>
-                    <a:pt x="1432450" y="3290839"/>
-                  </a:lnTo>
-                  <a:lnTo>
-                    <a:pt x="1360827" y="3303454"/>
-                  </a:lnTo>
-                  <a:lnTo>
-                    <a:pt x="1289205" y="3315628"/>
-                  </a:lnTo>
-                  <a:lnTo>
-                    <a:pt x="1217582" y="3327379"/>
-                  </a:lnTo>
-                  <a:lnTo>
-                    <a:pt x="1145960" y="3338719"/>
-                  </a:lnTo>
-                  <a:lnTo>
-                    <a:pt x="1074337" y="3349664"/>
-                  </a:lnTo>
-                  <a:lnTo>
-                    <a:pt x="1002715" y="3360228"/>
-                  </a:lnTo>
-                  <a:lnTo>
-                    <a:pt x="931092" y="3370423"/>
-                  </a:lnTo>
-                  <a:lnTo>
-                    <a:pt x="859470" y="3380262"/>
-                  </a:lnTo>
-                  <a:lnTo>
-                    <a:pt x="787847" y="3389759"/>
-                  </a:lnTo>
-                  <a:lnTo>
-                    <a:pt x="716225" y="3398925"/>
-                  </a:lnTo>
-                  <a:lnTo>
-                    <a:pt x="644602" y="3407771"/>
-                  </a:lnTo>
-                  <a:lnTo>
-                    <a:pt x="572980" y="3416308"/>
-                  </a:lnTo>
-                  <a:lnTo>
-                    <a:pt x="501357" y="3424548"/>
-                  </a:lnTo>
-                  <a:lnTo>
-                    <a:pt x="429735" y="3432501"/>
-                  </a:lnTo>
-                  <a:lnTo>
-                    <a:pt x="358112" y="3440176"/>
-                  </a:lnTo>
-                  <a:lnTo>
-                    <a:pt x="286490" y="3447584"/>
-                  </a:lnTo>
-                  <a:lnTo>
-                    <a:pt x="214867" y="3454733"/>
-                  </a:lnTo>
-                  <a:lnTo>
-                    <a:pt x="143245" y="3461633"/>
-                  </a:lnTo>
-                  <a:lnTo>
-                    <a:pt x="71622" y="3468293"/>
-                  </a:lnTo>
-                  <a:lnTo>
-                    <a:pt x="0" y="3474720"/>
+                    <a:pt x="7090630" y="3574401"/>
+                  </a:lnTo>
+                  <a:lnTo>
+                    <a:pt x="7019007" y="3570889"/>
+                  </a:lnTo>
+                  <a:lnTo>
+                    <a:pt x="6947385" y="3567220"/>
+                  </a:lnTo>
+                  <a:lnTo>
+                    <a:pt x="6875762" y="3563386"/>
+                  </a:lnTo>
+                  <a:lnTo>
+                    <a:pt x="6804139" y="3559379"/>
+                  </a:lnTo>
+                  <a:lnTo>
+                    <a:pt x="6732517" y="3555193"/>
+                  </a:lnTo>
+                  <a:lnTo>
+                    <a:pt x="6660894" y="3550819"/>
+                  </a:lnTo>
+                  <a:lnTo>
+                    <a:pt x="6589272" y="3546249"/>
+                  </a:lnTo>
+                  <a:lnTo>
+                    <a:pt x="6517649" y="3541474"/>
+                  </a:lnTo>
+                  <a:lnTo>
+                    <a:pt x="6446027" y="3536484"/>
+                  </a:lnTo>
+                  <a:lnTo>
+                    <a:pt x="6374404" y="3531270"/>
+                  </a:lnTo>
+                  <a:lnTo>
+                    <a:pt x="6302782" y="3525823"/>
+                  </a:lnTo>
+                  <a:lnTo>
+                    <a:pt x="6231159" y="3520131"/>
+                  </a:lnTo>
+                  <a:lnTo>
+                    <a:pt x="6159537" y="3514183"/>
+                  </a:lnTo>
+                  <a:lnTo>
+                    <a:pt x="6087914" y="3507968"/>
+                  </a:lnTo>
+                  <a:lnTo>
+                    <a:pt x="6016292" y="3501475"/>
+                  </a:lnTo>
+                  <a:lnTo>
+                    <a:pt x="5944669" y="3494690"/>
+                  </a:lnTo>
+                  <a:lnTo>
+                    <a:pt x="5873047" y="3487600"/>
+                  </a:lnTo>
+                  <a:lnTo>
+                    <a:pt x="5801424" y="3480192"/>
+                  </a:lnTo>
+                  <a:lnTo>
+                    <a:pt x="5729802" y="3472452"/>
+                  </a:lnTo>
+                  <a:lnTo>
+                    <a:pt x="5658179" y="3464364"/>
+                  </a:lnTo>
+                  <a:lnTo>
+                    <a:pt x="5586557" y="3455913"/>
+                  </a:lnTo>
+                  <a:lnTo>
+                    <a:pt x="5514934" y="3447083"/>
+                  </a:lnTo>
+                  <a:lnTo>
+                    <a:pt x="5443311" y="3437857"/>
+                  </a:lnTo>
+                  <a:lnTo>
+                    <a:pt x="5371689" y="3428217"/>
+                  </a:lnTo>
+                  <a:lnTo>
+                    <a:pt x="5300066" y="3418143"/>
+                  </a:lnTo>
+                  <a:lnTo>
+                    <a:pt x="5228444" y="3407618"/>
+                  </a:lnTo>
+                  <a:lnTo>
+                    <a:pt x="5156821" y="3396620"/>
+                  </a:lnTo>
+                  <a:lnTo>
+                    <a:pt x="5085199" y="3385129"/>
+                  </a:lnTo>
+                  <a:lnTo>
+                    <a:pt x="5013576" y="3373122"/>
+                  </a:lnTo>
+                  <a:lnTo>
+                    <a:pt x="4941954" y="3360576"/>
+                  </a:lnTo>
+                  <a:lnTo>
+                    <a:pt x="4870331" y="3347467"/>
+                  </a:lnTo>
+                  <a:lnTo>
+                    <a:pt x="4798709" y="3333769"/>
+                  </a:lnTo>
+                  <a:lnTo>
+                    <a:pt x="4727086" y="3319457"/>
+                  </a:lnTo>
+                  <a:lnTo>
+                    <a:pt x="4655464" y="3304502"/>
+                  </a:lnTo>
+                  <a:lnTo>
+                    <a:pt x="4583841" y="3288876"/>
+                  </a:lnTo>
+                  <a:lnTo>
+                    <a:pt x="4512219" y="3272549"/>
+                  </a:lnTo>
+                  <a:lnTo>
+                    <a:pt x="4440596" y="3255489"/>
+                  </a:lnTo>
+                  <a:lnTo>
+                    <a:pt x="4368974" y="3237663"/>
+                  </a:lnTo>
+                  <a:lnTo>
+                    <a:pt x="4297351" y="3219037"/>
+                  </a:lnTo>
+                  <a:lnTo>
+                    <a:pt x="4225729" y="3199575"/>
+                  </a:lnTo>
+                  <a:lnTo>
+                    <a:pt x="4154106" y="3179240"/>
+                  </a:lnTo>
+                  <a:lnTo>
+                    <a:pt x="4082483" y="3157991"/>
+                  </a:lnTo>
+                  <a:lnTo>
+                    <a:pt x="4010861" y="3135790"/>
+                  </a:lnTo>
+                  <a:lnTo>
+                    <a:pt x="3939238" y="3112591"/>
+                  </a:lnTo>
+                  <a:lnTo>
+                    <a:pt x="3867616" y="3088351"/>
+                  </a:lnTo>
+                  <a:lnTo>
+                    <a:pt x="3795993" y="3063024"/>
+                  </a:lnTo>
+                  <a:lnTo>
+                    <a:pt x="3724371" y="3036559"/>
+                  </a:lnTo>
+                  <a:lnTo>
+                    <a:pt x="3652748" y="3008907"/>
+                  </a:lnTo>
+                  <a:lnTo>
+                    <a:pt x="3581126" y="2980014"/>
+                  </a:lnTo>
+                  <a:lnTo>
+                    <a:pt x="3509503" y="2949823"/>
+                  </a:lnTo>
+                  <a:lnTo>
+                    <a:pt x="3437881" y="2918278"/>
+                  </a:lnTo>
+                  <a:lnTo>
+                    <a:pt x="3366258" y="2885317"/>
+                  </a:lnTo>
+                  <a:lnTo>
+                    <a:pt x="3294636" y="2850876"/>
+                  </a:lnTo>
+                  <a:lnTo>
+                    <a:pt x="3223013" y="2814890"/>
+                  </a:lnTo>
+                  <a:lnTo>
+                    <a:pt x="3151391" y="2787534"/>
+                  </a:lnTo>
+                  <a:lnTo>
+                    <a:pt x="3079768" y="2817727"/>
+                  </a:lnTo>
+                  <a:lnTo>
+                    <a:pt x="3008146" y="2846867"/>
+                  </a:lnTo>
+                  <a:lnTo>
+                    <a:pt x="2936523" y="2874989"/>
+                  </a:lnTo>
+                  <a:lnTo>
+                    <a:pt x="2864901" y="2902130"/>
+                  </a:lnTo>
+                  <a:lnTo>
+                    <a:pt x="2793278" y="2928324"/>
+                  </a:lnTo>
+                  <a:lnTo>
+                    <a:pt x="2721655" y="2953603"/>
+                  </a:lnTo>
+                  <a:lnTo>
+                    <a:pt x="2650033" y="2978001"/>
+                  </a:lnTo>
+                  <a:lnTo>
+                    <a:pt x="2578410" y="3001546"/>
+                  </a:lnTo>
+                  <a:lnTo>
+                    <a:pt x="2506788" y="3024270"/>
+                  </a:lnTo>
+                  <a:lnTo>
+                    <a:pt x="2435165" y="3046201"/>
+                  </a:lnTo>
+                  <a:lnTo>
+                    <a:pt x="2363543" y="3067367"/>
+                  </a:lnTo>
+                  <a:lnTo>
+                    <a:pt x="2291920" y="3087794"/>
+                  </a:lnTo>
+                  <a:lnTo>
+                    <a:pt x="2220298" y="3107508"/>
+                  </a:lnTo>
+                  <a:lnTo>
+                    <a:pt x="2148675" y="3126533"/>
+                  </a:lnTo>
+                  <a:lnTo>
+                    <a:pt x="2077053" y="3144895"/>
+                  </a:lnTo>
+                  <a:lnTo>
+                    <a:pt x="2005430" y="3162616"/>
+                  </a:lnTo>
+                  <a:lnTo>
+                    <a:pt x="1933808" y="3179719"/>
+                  </a:lnTo>
+                  <a:lnTo>
+                    <a:pt x="1862185" y="3196224"/>
+                  </a:lnTo>
+                  <a:lnTo>
+                    <a:pt x="1790563" y="3212154"/>
+                  </a:lnTo>
+                  <a:lnTo>
+                    <a:pt x="1718940" y="3227527"/>
+                  </a:lnTo>
+                  <a:lnTo>
+                    <a:pt x="1647318" y="3242364"/>
+                  </a:lnTo>
+                  <a:lnTo>
+                    <a:pt x="1575695" y="3256684"/>
+                  </a:lnTo>
+                  <a:lnTo>
+                    <a:pt x="1504073" y="3270503"/>
+                  </a:lnTo>
+                  <a:lnTo>
+                    <a:pt x="1432450" y="3283840"/>
+                  </a:lnTo>
+                  <a:lnTo>
+                    <a:pt x="1360827" y="3296712"/>
+                  </a:lnTo>
+                  <a:lnTo>
+                    <a:pt x="1289205" y="3309134"/>
+                  </a:lnTo>
+                  <a:lnTo>
+                    <a:pt x="1217582" y="3321123"/>
+                  </a:lnTo>
+                  <a:lnTo>
+                    <a:pt x="1145960" y="3332694"/>
+                  </a:lnTo>
+                  <a:lnTo>
+                    <a:pt x="1074337" y="3343860"/>
+                  </a:lnTo>
+                  <a:lnTo>
+                    <a:pt x="1002715" y="3354637"/>
+                  </a:lnTo>
+                  <a:lnTo>
+                    <a:pt x="931092" y="3365038"/>
+                  </a:lnTo>
+                  <a:lnTo>
+                    <a:pt x="859470" y="3375076"/>
+                  </a:lnTo>
+                  <a:lnTo>
+                    <a:pt x="787847" y="3384763"/>
+                  </a:lnTo>
+                  <a:lnTo>
+                    <a:pt x="716225" y="3394112"/>
+                  </a:lnTo>
+                  <a:lnTo>
+                    <a:pt x="644602" y="3403135"/>
+                  </a:lnTo>
+                  <a:lnTo>
+                    <a:pt x="572980" y="3411843"/>
+                  </a:lnTo>
+                  <a:lnTo>
+                    <a:pt x="501357" y="3420248"/>
+                  </a:lnTo>
+                  <a:lnTo>
+                    <a:pt x="429735" y="3428358"/>
+                  </a:lnTo>
+                  <a:lnTo>
+                    <a:pt x="358112" y="3436186"/>
+                  </a:lnTo>
+                  <a:lnTo>
+                    <a:pt x="286490" y="3443741"/>
+                  </a:lnTo>
+                  <a:lnTo>
+                    <a:pt x="214867" y="3451032"/>
+                  </a:lnTo>
+                  <a:lnTo>
+                    <a:pt x="143245" y="3458068"/>
+                  </a:lnTo>
+                  <a:lnTo>
+                    <a:pt x="71622" y="3464859"/>
+                  </a:lnTo>
+                  <a:lnTo>
+                    <a:pt x="0" y="3471413"/>
                   </a:lnTo>
                   <a:close/>
                 </a:path>
@@ -3521,240 +3518,237 @@
           </p:nvSpPr>
           <p:spPr>
             <a:xfrm>
-              <a:off x="2031080" y="1896563"/>
-              <a:ext cx="5239637" cy="2774076"/>
+              <a:off x="1993429" y="1896563"/>
+              <a:ext cx="5233631" cy="2777288"/>
             </a:xfrm>
             <a:custGeom>
               <a:avLst/>
               <a:pathLst>
-                <a:path w="5239637" h="2774076">
+                <a:path w="5233631" h="2777288">
                   <a:moveTo>
                     <a:pt x="0" y="0"/>
                   </a:moveTo>
                   <a:lnTo>
-                    <a:pt x="439" y="1004"/>
-                  </a:lnTo>
-                  <a:lnTo>
-                    <a:pt x="72061" y="157703"/>
-                  </a:lnTo>
-                  <a:lnTo>
-                    <a:pt x="143684" y="307678"/>
-                  </a:lnTo>
-                  <a:lnTo>
-                    <a:pt x="215307" y="451218"/>
-                  </a:lnTo>
-                  <a:lnTo>
-                    <a:pt x="286929" y="588597"/>
-                  </a:lnTo>
-                  <a:lnTo>
-                    <a:pt x="358552" y="720082"/>
-                  </a:lnTo>
-                  <a:lnTo>
-                    <a:pt x="430174" y="845924"/>
-                  </a:lnTo>
-                  <a:lnTo>
-                    <a:pt x="501797" y="966366"/>
-                  </a:lnTo>
-                  <a:lnTo>
-                    <a:pt x="573419" y="1081640"/>
-                  </a:lnTo>
-                  <a:lnTo>
-                    <a:pt x="645042" y="1191967"/>
-                  </a:lnTo>
-                  <a:lnTo>
-                    <a:pt x="716664" y="1297559"/>
-                  </a:lnTo>
-                  <a:lnTo>
-                    <a:pt x="788287" y="1398621"/>
-                  </a:lnTo>
-                  <a:lnTo>
-                    <a:pt x="859909" y="1495346"/>
-                  </a:lnTo>
-                  <a:lnTo>
-                    <a:pt x="931532" y="1587920"/>
-                  </a:lnTo>
-                  <a:lnTo>
-                    <a:pt x="1003154" y="1676521"/>
-                  </a:lnTo>
-                  <a:lnTo>
-                    <a:pt x="1074777" y="1761321"/>
-                  </a:lnTo>
-                  <a:lnTo>
-                    <a:pt x="1146399" y="1842481"/>
-                  </a:lnTo>
-                  <a:lnTo>
-                    <a:pt x="1218022" y="1920159"/>
-                  </a:lnTo>
-                  <a:lnTo>
-                    <a:pt x="1289644" y="1994503"/>
-                  </a:lnTo>
-                  <a:lnTo>
-                    <a:pt x="1361267" y="2065658"/>
-                  </a:lnTo>
-                  <a:lnTo>
-                    <a:pt x="1432889" y="2133758"/>
-                  </a:lnTo>
-                  <a:lnTo>
-                    <a:pt x="1504512" y="2198937"/>
-                  </a:lnTo>
-                  <a:lnTo>
-                    <a:pt x="1576135" y="2261318"/>
-                  </a:lnTo>
-                  <a:lnTo>
-                    <a:pt x="1647757" y="2321023"/>
-                  </a:lnTo>
-                  <a:lnTo>
-                    <a:pt x="1719380" y="2378165"/>
-                  </a:lnTo>
-                  <a:lnTo>
-                    <a:pt x="1791002" y="2432856"/>
-                  </a:lnTo>
-                  <a:lnTo>
-                    <a:pt x="1862625" y="2485199"/>
-                  </a:lnTo>
-                  <a:lnTo>
-                    <a:pt x="1934247" y="2535297"/>
-                  </a:lnTo>
-                  <a:lnTo>
-                    <a:pt x="2005870" y="2583244"/>
-                  </a:lnTo>
-                  <a:lnTo>
-                    <a:pt x="2077492" y="2629135"/>
-                  </a:lnTo>
-                  <a:lnTo>
-                    <a:pt x="2149115" y="2673055"/>
-                  </a:lnTo>
-                  <a:lnTo>
-                    <a:pt x="2220737" y="2715092"/>
-                  </a:lnTo>
-                  <a:lnTo>
-                    <a:pt x="2292360" y="2755324"/>
-                  </a:lnTo>
-                  <a:lnTo>
-                    <a:pt x="2363982" y="2774076"/>
-                  </a:lnTo>
-                  <a:lnTo>
-                    <a:pt x="2435605" y="2742338"/>
-                  </a:lnTo>
-                  <a:lnTo>
-                    <a:pt x="2507227" y="2709453"/>
-                  </a:lnTo>
-                  <a:lnTo>
-                    <a:pt x="2578850" y="2675381"/>
-                  </a:lnTo>
-                  <a:lnTo>
-                    <a:pt x="2650472" y="2640077"/>
-                  </a:lnTo>
-                  <a:lnTo>
-                    <a:pt x="2722095" y="2603499"/>
-                  </a:lnTo>
-                  <a:lnTo>
-                    <a:pt x="2793717" y="2565598"/>
-                  </a:lnTo>
-                  <a:lnTo>
-                    <a:pt x="2865340" y="2526329"/>
-                  </a:lnTo>
-                  <a:lnTo>
-                    <a:pt x="2936963" y="2485641"/>
-                  </a:lnTo>
-                  <a:lnTo>
-                    <a:pt x="3008585" y="2443483"/>
-                  </a:lnTo>
-                  <a:lnTo>
-                    <a:pt x="3080208" y="2399803"/>
-                  </a:lnTo>
-                  <a:lnTo>
-                    <a:pt x="3151830" y="2354544"/>
-                  </a:lnTo>
-                  <a:lnTo>
-                    <a:pt x="3223453" y="2307651"/>
-                  </a:lnTo>
-                  <a:lnTo>
-                    <a:pt x="3295075" y="2259063"/>
-                  </a:lnTo>
-                  <a:lnTo>
-                    <a:pt x="3366698" y="2208720"/>
-                  </a:lnTo>
-                  <a:lnTo>
-                    <a:pt x="3438320" y="2156559"/>
-                  </a:lnTo>
-                  <a:lnTo>
-                    <a:pt x="3509943" y="2102513"/>
-                  </a:lnTo>
-                  <a:lnTo>
-                    <a:pt x="3581565" y="2046515"/>
-                  </a:lnTo>
-                  <a:lnTo>
-                    <a:pt x="3653188" y="1988494"/>
-                  </a:lnTo>
-                  <a:lnTo>
-                    <a:pt x="3724810" y="1928376"/>
-                  </a:lnTo>
-                  <a:lnTo>
-                    <a:pt x="3796433" y="1866088"/>
-                  </a:lnTo>
-                  <a:lnTo>
-                    <a:pt x="3868055" y="1801549"/>
-                  </a:lnTo>
-                  <a:lnTo>
-                    <a:pt x="3939678" y="1734678"/>
-                  </a:lnTo>
-                  <a:lnTo>
-                    <a:pt x="4011300" y="1665392"/>
-                  </a:lnTo>
-                  <a:lnTo>
-                    <a:pt x="4082923" y="1593603"/>
-                  </a:lnTo>
-                  <a:lnTo>
-                    <a:pt x="4154545" y="1519221"/>
-                  </a:lnTo>
-                  <a:lnTo>
-                    <a:pt x="4226168" y="1442151"/>
-                  </a:lnTo>
-                  <a:lnTo>
-                    <a:pt x="4297791" y="1362297"/>
-                  </a:lnTo>
-                  <a:lnTo>
-                    <a:pt x="4369413" y="1279559"/>
-                  </a:lnTo>
-                  <a:lnTo>
-                    <a:pt x="4441036" y="1193832"/>
-                  </a:lnTo>
-                  <a:lnTo>
-                    <a:pt x="4512658" y="1105008"/>
-                  </a:lnTo>
-                  <a:lnTo>
-                    <a:pt x="4584281" y="1012975"/>
-                  </a:lnTo>
-                  <a:lnTo>
-                    <a:pt x="4655903" y="917617"/>
-                  </a:lnTo>
-                  <a:lnTo>
-                    <a:pt x="4727526" y="818815"/>
-                  </a:lnTo>
-                  <a:lnTo>
-                    <a:pt x="4799148" y="716444"/>
-                  </a:lnTo>
-                  <a:lnTo>
-                    <a:pt x="4870771" y="610374"/>
-                  </a:lnTo>
-                  <a:lnTo>
-                    <a:pt x="4942393" y="500472"/>
-                  </a:lnTo>
-                  <a:lnTo>
-                    <a:pt x="5014016" y="386601"/>
-                  </a:lnTo>
-                  <a:lnTo>
-                    <a:pt x="5085638" y="268616"/>
-                  </a:lnTo>
-                  <a:lnTo>
-                    <a:pt x="5157261" y="146368"/>
-                  </a:lnTo>
-                  <a:lnTo>
-                    <a:pt x="5228883" y="19705"/>
-                  </a:lnTo>
-                  <a:lnTo>
-                    <a:pt x="5239637" y="0"/>
+                    <a:pt x="38090" y="85156"/>
+                  </a:lnTo>
+                  <a:lnTo>
+                    <a:pt x="109712" y="238401"/>
+                  </a:lnTo>
+                  <a:lnTo>
+                    <a:pt x="181335" y="385062"/>
+                  </a:lnTo>
+                  <a:lnTo>
+                    <a:pt x="252957" y="525424"/>
+                  </a:lnTo>
+                  <a:lnTo>
+                    <a:pt x="324580" y="659757"/>
+                  </a:lnTo>
+                  <a:lnTo>
+                    <a:pt x="396202" y="788319"/>
+                  </a:lnTo>
+                  <a:lnTo>
+                    <a:pt x="467825" y="911359"/>
+                  </a:lnTo>
+                  <a:lnTo>
+                    <a:pt x="539447" y="1029113"/>
+                  </a:lnTo>
+                  <a:lnTo>
+                    <a:pt x="611070" y="1141810"/>
+                  </a:lnTo>
+                  <a:lnTo>
+                    <a:pt x="682692" y="1249665"/>
+                  </a:lnTo>
+                  <a:lnTo>
+                    <a:pt x="754315" y="1352887"/>
+                  </a:lnTo>
+                  <a:lnTo>
+                    <a:pt x="825937" y="1451675"/>
+                  </a:lnTo>
+                  <a:lnTo>
+                    <a:pt x="897560" y="1546220"/>
+                  </a:lnTo>
+                  <a:lnTo>
+                    <a:pt x="969182" y="1636703"/>
+                  </a:lnTo>
+                  <a:lnTo>
+                    <a:pt x="1040805" y="1723300"/>
+                  </a:lnTo>
+                  <a:lnTo>
+                    <a:pt x="1112428" y="1806176"/>
+                  </a:lnTo>
+                  <a:lnTo>
+                    <a:pt x="1184050" y="1885493"/>
+                  </a:lnTo>
+                  <a:lnTo>
+                    <a:pt x="1255673" y="1961403"/>
+                  </a:lnTo>
+                  <a:lnTo>
+                    <a:pt x="1327295" y="2034051"/>
+                  </a:lnTo>
+                  <a:lnTo>
+                    <a:pt x="1398918" y="2103580"/>
+                  </a:lnTo>
+                  <a:lnTo>
+                    <a:pt x="1470540" y="2170121"/>
+                  </a:lnTo>
+                  <a:lnTo>
+                    <a:pt x="1542163" y="2233804"/>
+                  </a:lnTo>
+                  <a:lnTo>
+                    <a:pt x="1613785" y="2294752"/>
+                  </a:lnTo>
+                  <a:lnTo>
+                    <a:pt x="1685408" y="2353081"/>
+                  </a:lnTo>
+                  <a:lnTo>
+                    <a:pt x="1757030" y="2408905"/>
+                  </a:lnTo>
+                  <a:lnTo>
+                    <a:pt x="1828653" y="2462331"/>
+                  </a:lnTo>
+                  <a:lnTo>
+                    <a:pt x="1900275" y="2513462"/>
+                  </a:lnTo>
+                  <a:lnTo>
+                    <a:pt x="1971898" y="2562397"/>
+                  </a:lnTo>
+                  <a:lnTo>
+                    <a:pt x="2043520" y="2609229"/>
+                  </a:lnTo>
+                  <a:lnTo>
+                    <a:pt x="2115143" y="2654050"/>
+                  </a:lnTo>
+                  <a:lnTo>
+                    <a:pt x="2186765" y="2696946"/>
+                  </a:lnTo>
+                  <a:lnTo>
+                    <a:pt x="2258388" y="2737998"/>
+                  </a:lnTo>
+                  <a:lnTo>
+                    <a:pt x="2330010" y="2777288"/>
+                  </a:lnTo>
+                  <a:lnTo>
+                    <a:pt x="2401633" y="2756249"/>
+                  </a:lnTo>
+                  <a:lnTo>
+                    <a:pt x="2473256" y="2723832"/>
+                  </a:lnTo>
+                  <a:lnTo>
+                    <a:pt x="2544878" y="2690243"/>
+                  </a:lnTo>
+                  <a:lnTo>
+                    <a:pt x="2616501" y="2655440"/>
+                  </a:lnTo>
+                  <a:lnTo>
+                    <a:pt x="2688123" y="2619377"/>
+                  </a:lnTo>
+                  <a:lnTo>
+                    <a:pt x="2759746" y="2582011"/>
+                  </a:lnTo>
+                  <a:lnTo>
+                    <a:pt x="2831368" y="2543294"/>
+                  </a:lnTo>
+                  <a:lnTo>
+                    <a:pt x="2902991" y="2503176"/>
+                  </a:lnTo>
+                  <a:lnTo>
+                    <a:pt x="2974613" y="2461607"/>
+                  </a:lnTo>
+                  <a:lnTo>
+                    <a:pt x="3046236" y="2418536"/>
+                  </a:lnTo>
+                  <a:lnTo>
+                    <a:pt x="3117858" y="2373906"/>
+                  </a:lnTo>
+                  <a:lnTo>
+                    <a:pt x="3189481" y="2327663"/>
+                  </a:lnTo>
+                  <a:lnTo>
+                    <a:pt x="3261103" y="2279747"/>
+                  </a:lnTo>
+                  <a:lnTo>
+                    <a:pt x="3332726" y="2230099"/>
+                  </a:lnTo>
+                  <a:lnTo>
+                    <a:pt x="3404348" y="2178655"/>
+                  </a:lnTo>
+                  <a:lnTo>
+                    <a:pt x="3475971" y="2125351"/>
+                  </a:lnTo>
+                  <a:lnTo>
+                    <a:pt x="3547593" y="2070119"/>
+                  </a:lnTo>
+                  <a:lnTo>
+                    <a:pt x="3619216" y="2012890"/>
+                  </a:lnTo>
+                  <a:lnTo>
+                    <a:pt x="3690838" y="1953591"/>
+                  </a:lnTo>
+                  <a:lnTo>
+                    <a:pt x="3762461" y="1892148"/>
+                  </a:lnTo>
+                  <a:lnTo>
+                    <a:pt x="3834084" y="1828482"/>
+                  </a:lnTo>
+                  <a:lnTo>
+                    <a:pt x="3905706" y="1762515"/>
+                  </a:lnTo>
+                  <a:lnTo>
+                    <a:pt x="3977329" y="1694162"/>
+                  </a:lnTo>
+                  <a:lnTo>
+                    <a:pt x="4048951" y="1623336"/>
+                  </a:lnTo>
+                  <a:lnTo>
+                    <a:pt x="4120574" y="1549950"/>
+                  </a:lnTo>
+                  <a:lnTo>
+                    <a:pt x="4192196" y="1473910"/>
+                  </a:lnTo>
+                  <a:lnTo>
+                    <a:pt x="4263819" y="1395120"/>
+                  </a:lnTo>
+                  <a:lnTo>
+                    <a:pt x="4335441" y="1313480"/>
+                  </a:lnTo>
+                  <a:lnTo>
+                    <a:pt x="4407064" y="1228889"/>
+                  </a:lnTo>
+                  <a:lnTo>
+                    <a:pt x="4478686" y="1141238"/>
+                  </a:lnTo>
+                  <a:lnTo>
+                    <a:pt x="4550309" y="1050417"/>
+                  </a:lnTo>
+                  <a:lnTo>
+                    <a:pt x="4621931" y="956312"/>
+                  </a:lnTo>
+                  <a:lnTo>
+                    <a:pt x="4693554" y="858804"/>
+                  </a:lnTo>
+                  <a:lnTo>
+                    <a:pt x="4765176" y="757769"/>
+                  </a:lnTo>
+                  <a:lnTo>
+                    <a:pt x="4836799" y="653081"/>
+                  </a:lnTo>
+                  <a:lnTo>
+                    <a:pt x="4908421" y="544607"/>
+                  </a:lnTo>
+                  <a:lnTo>
+                    <a:pt x="4980044" y="432211"/>
+                  </a:lnTo>
+                  <a:lnTo>
+                    <a:pt x="5051666" y="315749"/>
+                  </a:lnTo>
+                  <a:lnTo>
+                    <a:pt x="5123289" y="195076"/>
+                  </a:lnTo>
+                  <a:lnTo>
+                    <a:pt x="5194912" y="70039"/>
+                  </a:lnTo>
+                  <a:lnTo>
+                    <a:pt x="5233631" y="0"/>
                   </a:lnTo>
                 </a:path>
               </a:pathLst>
@@ -3774,312 +3768,312 @@
           </p:nvSpPr>
           <p:spPr>
             <a:xfrm>
-              <a:off x="1172049" y="4690393"/>
-              <a:ext cx="7090630" cy="778405"/>
+              <a:off x="1172049" y="4684097"/>
+              <a:ext cx="7090630" cy="786867"/>
             </a:xfrm>
             <a:custGeom>
               <a:avLst/>
               <a:pathLst>
-                <a:path w="7090630" h="778405">
+                <a:path w="7090630" h="786867">
                   <a:moveTo>
-                    <a:pt x="7090630" y="778405"/>
+                    <a:pt x="7090630" y="786867"/>
                   </a:moveTo>
                   <a:lnTo>
-                    <a:pt x="7019007" y="774800"/>
-                  </a:lnTo>
-                  <a:lnTo>
-                    <a:pt x="6947385" y="771033"/>
-                  </a:lnTo>
-                  <a:lnTo>
-                    <a:pt x="6875762" y="767098"/>
-                  </a:lnTo>
-                  <a:lnTo>
-                    <a:pt x="6804139" y="762985"/>
-                  </a:lnTo>
-                  <a:lnTo>
-                    <a:pt x="6732517" y="758689"/>
-                  </a:lnTo>
-                  <a:lnTo>
-                    <a:pt x="6660894" y="754200"/>
-                  </a:lnTo>
-                  <a:lnTo>
-                    <a:pt x="6589272" y="749509"/>
-                  </a:lnTo>
-                  <a:lnTo>
-                    <a:pt x="6517649" y="744608"/>
-                  </a:lnTo>
-                  <a:lnTo>
-                    <a:pt x="6446027" y="739488"/>
-                  </a:lnTo>
-                  <a:lnTo>
-                    <a:pt x="6374404" y="734138"/>
-                  </a:lnTo>
-                  <a:lnTo>
-                    <a:pt x="6302782" y="728548"/>
-                  </a:lnTo>
-                  <a:lnTo>
-                    <a:pt x="6231159" y="722707"/>
-                  </a:lnTo>
-                  <a:lnTo>
-                    <a:pt x="6159537" y="716605"/>
-                  </a:lnTo>
-                  <a:lnTo>
-                    <a:pt x="6087914" y="710229"/>
-                  </a:lnTo>
-                  <a:lnTo>
-                    <a:pt x="6016292" y="703567"/>
-                  </a:lnTo>
-                  <a:lnTo>
-                    <a:pt x="5944669" y="696606"/>
-                  </a:lnTo>
-                  <a:lnTo>
-                    <a:pt x="5873047" y="689334"/>
-                  </a:lnTo>
-                  <a:lnTo>
-                    <a:pt x="5801424" y="681735"/>
-                  </a:lnTo>
-                  <a:lnTo>
-                    <a:pt x="5729802" y="673795"/>
-                  </a:lnTo>
-                  <a:lnTo>
-                    <a:pt x="5658179" y="665500"/>
-                  </a:lnTo>
-                  <a:lnTo>
-                    <a:pt x="5586557" y="656832"/>
-                  </a:lnTo>
-                  <a:lnTo>
-                    <a:pt x="5514934" y="647776"/>
-                  </a:lnTo>
-                  <a:lnTo>
-                    <a:pt x="5443311" y="638314"/>
-                  </a:lnTo>
-                  <a:lnTo>
-                    <a:pt x="5371689" y="628428"/>
-                  </a:lnTo>
-                  <a:lnTo>
-                    <a:pt x="5300066" y="618098"/>
-                  </a:lnTo>
-                  <a:lnTo>
-                    <a:pt x="5228444" y="607306"/>
-                  </a:lnTo>
-                  <a:lnTo>
-                    <a:pt x="5156821" y="596029"/>
-                  </a:lnTo>
-                  <a:lnTo>
-                    <a:pt x="5085199" y="584247"/>
-                  </a:lnTo>
-                  <a:lnTo>
-                    <a:pt x="5013576" y="571937"/>
-                  </a:lnTo>
-                  <a:lnTo>
-                    <a:pt x="4941954" y="559074"/>
-                  </a:lnTo>
-                  <a:lnTo>
-                    <a:pt x="4870331" y="545635"/>
-                  </a:lnTo>
-                  <a:lnTo>
-                    <a:pt x="4798709" y="531593"/>
-                  </a:lnTo>
-                  <a:lnTo>
-                    <a:pt x="4727086" y="516922"/>
-                  </a:lnTo>
-                  <a:lnTo>
-                    <a:pt x="4655464" y="501593"/>
-                  </a:lnTo>
-                  <a:lnTo>
-                    <a:pt x="4583841" y="485577"/>
-                  </a:lnTo>
-                  <a:lnTo>
-                    <a:pt x="4512219" y="468842"/>
-                  </a:lnTo>
-                  <a:lnTo>
-                    <a:pt x="4440596" y="451357"/>
-                  </a:lnTo>
-                  <a:lnTo>
-                    <a:pt x="4368974" y="433089"/>
-                  </a:lnTo>
-                  <a:lnTo>
-                    <a:pt x="4297351" y="414001"/>
-                  </a:lnTo>
-                  <a:lnTo>
-                    <a:pt x="4225729" y="394057"/>
-                  </a:lnTo>
-                  <a:lnTo>
-                    <a:pt x="4154106" y="373220"/>
-                  </a:lnTo>
-                  <a:lnTo>
-                    <a:pt x="4082483" y="351447"/>
-                  </a:lnTo>
-                  <a:lnTo>
-                    <a:pt x="4010861" y="328699"/>
-                  </a:lnTo>
-                  <a:lnTo>
-                    <a:pt x="3939238" y="304931"/>
-                  </a:lnTo>
-                  <a:lnTo>
-                    <a:pt x="3867616" y="280097"/>
-                  </a:lnTo>
-                  <a:lnTo>
-                    <a:pt x="3795993" y="254150"/>
-                  </a:lnTo>
-                  <a:lnTo>
-                    <a:pt x="3724371" y="227039"/>
-                  </a:lnTo>
-                  <a:lnTo>
-                    <a:pt x="3652748" y="198713"/>
-                  </a:lnTo>
-                  <a:lnTo>
-                    <a:pt x="3581126" y="169116"/>
-                  </a:lnTo>
-                  <a:lnTo>
-                    <a:pt x="3509503" y="138193"/>
-                  </a:lnTo>
-                  <a:lnTo>
-                    <a:pt x="3437881" y="105883"/>
-                  </a:lnTo>
-                  <a:lnTo>
-                    <a:pt x="3366258" y="72125"/>
-                  </a:lnTo>
-                  <a:lnTo>
-                    <a:pt x="3294636" y="36853"/>
-                  </a:lnTo>
-                  <a:lnTo>
-                    <a:pt x="3223013" y="0"/>
-                  </a:lnTo>
-                  <a:lnTo>
-                    <a:pt x="3151391" y="10877"/>
-                  </a:lnTo>
-                  <a:lnTo>
-                    <a:pt x="3079768" y="40441"/>
-                  </a:lnTo>
-                  <a:lnTo>
-                    <a:pt x="3008146" y="68974"/>
-                  </a:lnTo>
-                  <a:lnTo>
-                    <a:pt x="2936523" y="96512"/>
-                  </a:lnTo>
-                  <a:lnTo>
-                    <a:pt x="2864901" y="123090"/>
-                  </a:lnTo>
-                  <a:lnTo>
-                    <a:pt x="2793278" y="148741"/>
-                  </a:lnTo>
-                  <a:lnTo>
-                    <a:pt x="2721655" y="173498"/>
-                  </a:lnTo>
-                  <a:lnTo>
-                    <a:pt x="2650033" y="197392"/>
-                  </a:lnTo>
-                  <a:lnTo>
-                    <a:pt x="2578410" y="220452"/>
-                  </a:lnTo>
-                  <a:lnTo>
-                    <a:pt x="2506788" y="242709"/>
-                  </a:lnTo>
-                  <a:lnTo>
-                    <a:pt x="2435165" y="264190"/>
-                  </a:lnTo>
-                  <a:lnTo>
-                    <a:pt x="2363543" y="284921"/>
-                  </a:lnTo>
-                  <a:lnTo>
-                    <a:pt x="2291920" y="304930"/>
-                  </a:lnTo>
-                  <a:lnTo>
-                    <a:pt x="2220298" y="324241"/>
-                  </a:lnTo>
-                  <a:lnTo>
-                    <a:pt x="2148675" y="342879"/>
-                  </a:lnTo>
-                  <a:lnTo>
-                    <a:pt x="2077053" y="360868"/>
-                  </a:lnTo>
-                  <a:lnTo>
-                    <a:pt x="2005430" y="378229"/>
-                  </a:lnTo>
-                  <a:lnTo>
-                    <a:pt x="1933808" y="394984"/>
-                  </a:lnTo>
-                  <a:lnTo>
-                    <a:pt x="1862185" y="411156"/>
-                  </a:lnTo>
-                  <a:lnTo>
-                    <a:pt x="1790563" y="426764"/>
-                  </a:lnTo>
-                  <a:lnTo>
-                    <a:pt x="1718940" y="441827"/>
-                  </a:lnTo>
-                  <a:lnTo>
-                    <a:pt x="1647318" y="456366"/>
-                  </a:lnTo>
-                  <a:lnTo>
-                    <a:pt x="1575695" y="470397"/>
-                  </a:lnTo>
-                  <a:lnTo>
-                    <a:pt x="1504073" y="483939"/>
-                  </a:lnTo>
-                  <a:lnTo>
-                    <a:pt x="1432450" y="497009"/>
-                  </a:lnTo>
-                  <a:lnTo>
-                    <a:pt x="1360827" y="509624"/>
-                  </a:lnTo>
-                  <a:lnTo>
-                    <a:pt x="1289205" y="521798"/>
-                  </a:lnTo>
-                  <a:lnTo>
-                    <a:pt x="1217582" y="533549"/>
-                  </a:lnTo>
-                  <a:lnTo>
-                    <a:pt x="1145960" y="544889"/>
-                  </a:lnTo>
-                  <a:lnTo>
-                    <a:pt x="1074337" y="555834"/>
-                  </a:lnTo>
-                  <a:lnTo>
-                    <a:pt x="1002715" y="566397"/>
-                  </a:lnTo>
-                  <a:lnTo>
-                    <a:pt x="931092" y="576593"/>
-                  </a:lnTo>
-                  <a:lnTo>
-                    <a:pt x="859470" y="586432"/>
-                  </a:lnTo>
-                  <a:lnTo>
-                    <a:pt x="787847" y="595929"/>
-                  </a:lnTo>
-                  <a:lnTo>
-                    <a:pt x="716225" y="605095"/>
-                  </a:lnTo>
-                  <a:lnTo>
-                    <a:pt x="644602" y="613941"/>
-                  </a:lnTo>
-                  <a:lnTo>
-                    <a:pt x="572980" y="622478"/>
-                  </a:lnTo>
-                  <a:lnTo>
-                    <a:pt x="501357" y="630718"/>
-                  </a:lnTo>
-                  <a:lnTo>
-                    <a:pt x="429735" y="638671"/>
-                  </a:lnTo>
-                  <a:lnTo>
-                    <a:pt x="358112" y="646346"/>
-                  </a:lnTo>
-                  <a:lnTo>
-                    <a:pt x="286490" y="653754"/>
-                  </a:lnTo>
-                  <a:lnTo>
-                    <a:pt x="214867" y="660903"/>
-                  </a:lnTo>
-                  <a:lnTo>
-                    <a:pt x="143245" y="667803"/>
-                  </a:lnTo>
-                  <a:lnTo>
-                    <a:pt x="71622" y="674463"/>
-                  </a:lnTo>
-                  <a:lnTo>
-                    <a:pt x="0" y="680890"/>
+                    <a:pt x="7019007" y="783355"/>
+                  </a:lnTo>
+                  <a:lnTo>
+                    <a:pt x="6947385" y="779686"/>
+                  </a:lnTo>
+                  <a:lnTo>
+                    <a:pt x="6875762" y="775852"/>
+                  </a:lnTo>
+                  <a:lnTo>
+                    <a:pt x="6804139" y="771845"/>
+                  </a:lnTo>
+                  <a:lnTo>
+                    <a:pt x="6732517" y="767659"/>
+                  </a:lnTo>
+                  <a:lnTo>
+                    <a:pt x="6660894" y="763285"/>
+                  </a:lnTo>
+                  <a:lnTo>
+                    <a:pt x="6589272" y="758715"/>
+                  </a:lnTo>
+                  <a:lnTo>
+                    <a:pt x="6517649" y="753940"/>
+                  </a:lnTo>
+                  <a:lnTo>
+                    <a:pt x="6446027" y="748950"/>
+                  </a:lnTo>
+                  <a:lnTo>
+                    <a:pt x="6374404" y="743736"/>
+                  </a:lnTo>
+                  <a:lnTo>
+                    <a:pt x="6302782" y="738289"/>
+                  </a:lnTo>
+                  <a:lnTo>
+                    <a:pt x="6231159" y="732596"/>
+                  </a:lnTo>
+                  <a:lnTo>
+                    <a:pt x="6159537" y="726649"/>
+                  </a:lnTo>
+                  <a:lnTo>
+                    <a:pt x="6087914" y="720434"/>
+                  </a:lnTo>
+                  <a:lnTo>
+                    <a:pt x="6016292" y="713940"/>
+                  </a:lnTo>
+                  <a:lnTo>
+                    <a:pt x="5944669" y="707155"/>
+                  </a:lnTo>
+                  <a:lnTo>
+                    <a:pt x="5873047" y="700066"/>
+                  </a:lnTo>
+                  <a:lnTo>
+                    <a:pt x="5801424" y="692658"/>
+                  </a:lnTo>
+                  <a:lnTo>
+                    <a:pt x="5729802" y="684918"/>
+                  </a:lnTo>
+                  <a:lnTo>
+                    <a:pt x="5658179" y="676830"/>
+                  </a:lnTo>
+                  <a:lnTo>
+                    <a:pt x="5586557" y="668379"/>
+                  </a:lnTo>
+                  <a:lnTo>
+                    <a:pt x="5514934" y="659549"/>
+                  </a:lnTo>
+                  <a:lnTo>
+                    <a:pt x="5443311" y="650323"/>
+                  </a:lnTo>
+                  <a:lnTo>
+                    <a:pt x="5371689" y="640682"/>
+                  </a:lnTo>
+                  <a:lnTo>
+                    <a:pt x="5300066" y="630609"/>
+                  </a:lnTo>
+                  <a:lnTo>
+                    <a:pt x="5228444" y="620084"/>
+                  </a:lnTo>
+                  <a:lnTo>
+                    <a:pt x="5156821" y="609086"/>
+                  </a:lnTo>
+                  <a:lnTo>
+                    <a:pt x="5085199" y="597595"/>
+                  </a:lnTo>
+                  <a:lnTo>
+                    <a:pt x="5013576" y="585588"/>
+                  </a:lnTo>
+                  <a:lnTo>
+                    <a:pt x="4941954" y="573042"/>
+                  </a:lnTo>
+                  <a:lnTo>
+                    <a:pt x="4870331" y="559933"/>
+                  </a:lnTo>
+                  <a:lnTo>
+                    <a:pt x="4798709" y="546235"/>
+                  </a:lnTo>
+                  <a:lnTo>
+                    <a:pt x="4727086" y="531923"/>
+                  </a:lnTo>
+                  <a:lnTo>
+                    <a:pt x="4655464" y="516968"/>
+                  </a:lnTo>
+                  <a:lnTo>
+                    <a:pt x="4583841" y="501342"/>
+                  </a:lnTo>
+                  <a:lnTo>
+                    <a:pt x="4512219" y="485015"/>
+                  </a:lnTo>
+                  <a:lnTo>
+                    <a:pt x="4440596" y="467955"/>
+                  </a:lnTo>
+                  <a:lnTo>
+                    <a:pt x="4368974" y="450129"/>
+                  </a:lnTo>
+                  <a:lnTo>
+                    <a:pt x="4297351" y="431503"/>
+                  </a:lnTo>
+                  <a:lnTo>
+                    <a:pt x="4225729" y="412041"/>
+                  </a:lnTo>
+                  <a:lnTo>
+                    <a:pt x="4154106" y="391705"/>
+                  </a:lnTo>
+                  <a:lnTo>
+                    <a:pt x="4082483" y="370457"/>
+                  </a:lnTo>
+                  <a:lnTo>
+                    <a:pt x="4010861" y="348255"/>
+                  </a:lnTo>
+                  <a:lnTo>
+                    <a:pt x="3939238" y="325057"/>
+                  </a:lnTo>
+                  <a:lnTo>
+                    <a:pt x="3867616" y="300817"/>
+                  </a:lnTo>
+                  <a:lnTo>
+                    <a:pt x="3795993" y="275490"/>
+                  </a:lnTo>
+                  <a:lnTo>
+                    <a:pt x="3724371" y="249025"/>
+                  </a:lnTo>
+                  <a:lnTo>
+                    <a:pt x="3652748" y="221373"/>
+                  </a:lnTo>
+                  <a:lnTo>
+                    <a:pt x="3581126" y="192479"/>
+                  </a:lnTo>
+                  <a:lnTo>
+                    <a:pt x="3509503" y="162289"/>
+                  </a:lnTo>
+                  <a:lnTo>
+                    <a:pt x="3437881" y="130744"/>
+                  </a:lnTo>
+                  <a:lnTo>
+                    <a:pt x="3366258" y="97782"/>
+                  </a:lnTo>
+                  <a:lnTo>
+                    <a:pt x="3294636" y="63342"/>
+                  </a:lnTo>
+                  <a:lnTo>
+                    <a:pt x="3223013" y="27355"/>
+                  </a:lnTo>
+                  <a:lnTo>
+                    <a:pt x="3151391" y="0"/>
+                  </a:lnTo>
+                  <a:lnTo>
+                    <a:pt x="3079768" y="30193"/>
+                  </a:lnTo>
+                  <a:lnTo>
+                    <a:pt x="3008146" y="59332"/>
+                  </a:lnTo>
+                  <a:lnTo>
+                    <a:pt x="2936523" y="87455"/>
+                  </a:lnTo>
+                  <a:lnTo>
+                    <a:pt x="2864901" y="114596"/>
+                  </a:lnTo>
+                  <a:lnTo>
+                    <a:pt x="2793278" y="140790"/>
+                  </a:lnTo>
+                  <a:lnTo>
+                    <a:pt x="2721655" y="166069"/>
+                  </a:lnTo>
+                  <a:lnTo>
+                    <a:pt x="2650033" y="190466"/>
+                  </a:lnTo>
+                  <a:lnTo>
+                    <a:pt x="2578410" y="214012"/>
+                  </a:lnTo>
+                  <a:lnTo>
+                    <a:pt x="2506788" y="236736"/>
+                  </a:lnTo>
+                  <a:lnTo>
+                    <a:pt x="2435165" y="258667"/>
+                  </a:lnTo>
+                  <a:lnTo>
+                    <a:pt x="2363543" y="279833"/>
+                  </a:lnTo>
+                  <a:lnTo>
+                    <a:pt x="2291920" y="300259"/>
+                  </a:lnTo>
+                  <a:lnTo>
+                    <a:pt x="2220298" y="319973"/>
+                  </a:lnTo>
+                  <a:lnTo>
+                    <a:pt x="2148675" y="338999"/>
+                  </a:lnTo>
+                  <a:lnTo>
+                    <a:pt x="2077053" y="357361"/>
+                  </a:lnTo>
+                  <a:lnTo>
+                    <a:pt x="2005430" y="375082"/>
+                  </a:lnTo>
+                  <a:lnTo>
+                    <a:pt x="1933808" y="392185"/>
+                  </a:lnTo>
+                  <a:lnTo>
+                    <a:pt x="1862185" y="408690"/>
+                  </a:lnTo>
+                  <a:lnTo>
+                    <a:pt x="1790563" y="424620"/>
+                  </a:lnTo>
+                  <a:lnTo>
+                    <a:pt x="1718940" y="439993"/>
+                  </a:lnTo>
+                  <a:lnTo>
+                    <a:pt x="1647318" y="454830"/>
+                  </a:lnTo>
+                  <a:lnTo>
+                    <a:pt x="1575695" y="469149"/>
+                  </a:lnTo>
+                  <a:lnTo>
+                    <a:pt x="1504073" y="482969"/>
+                  </a:lnTo>
+                  <a:lnTo>
+                    <a:pt x="1432450" y="496306"/>
+                  </a:lnTo>
+                  <a:lnTo>
+                    <a:pt x="1360827" y="509178"/>
+                  </a:lnTo>
+                  <a:lnTo>
+                    <a:pt x="1289205" y="521600"/>
+                  </a:lnTo>
+                  <a:lnTo>
+                    <a:pt x="1217582" y="533589"/>
+                  </a:lnTo>
+                  <a:lnTo>
+                    <a:pt x="1145960" y="545159"/>
+                  </a:lnTo>
+                  <a:lnTo>
+                    <a:pt x="1074337" y="556326"/>
+                  </a:lnTo>
+                  <a:lnTo>
+                    <a:pt x="1002715" y="567103"/>
+                  </a:lnTo>
+                  <a:lnTo>
+                    <a:pt x="931092" y="577504"/>
+                  </a:lnTo>
+                  <a:lnTo>
+                    <a:pt x="859470" y="587541"/>
+                  </a:lnTo>
+                  <a:lnTo>
+                    <a:pt x="787847" y="597229"/>
+                  </a:lnTo>
+                  <a:lnTo>
+                    <a:pt x="716225" y="606578"/>
+                  </a:lnTo>
+                  <a:lnTo>
+                    <a:pt x="644602" y="615601"/>
+                  </a:lnTo>
+                  <a:lnTo>
+                    <a:pt x="572980" y="624309"/>
+                  </a:lnTo>
+                  <a:lnTo>
+                    <a:pt x="501357" y="632713"/>
+                  </a:lnTo>
+                  <a:lnTo>
+                    <a:pt x="429735" y="640824"/>
+                  </a:lnTo>
+                  <a:lnTo>
+                    <a:pt x="358112" y="648652"/>
+                  </a:lnTo>
+                  <a:lnTo>
+                    <a:pt x="286490" y="656207"/>
+                  </a:lnTo>
+                  <a:lnTo>
+                    <a:pt x="214867" y="663498"/>
+                  </a:lnTo>
+                  <a:lnTo>
+                    <a:pt x="143245" y="670534"/>
+                  </a:lnTo>
+                  <a:lnTo>
+                    <a:pt x="71622" y="677325"/>
+                  </a:lnTo>
+                  <a:lnTo>
+                    <a:pt x="0" y="683879"/>
                   </a:lnTo>
                 </a:path>
               </a:pathLst>
@@ -4099,312 +4093,312 @@
           </p:nvSpPr>
           <p:spPr>
             <a:xfrm>
-              <a:off x="1172049" y="4500513"/>
-              <a:ext cx="7090630" cy="355805"/>
+              <a:off x="1172049" y="4502789"/>
+              <a:ext cx="7090630" cy="355332"/>
             </a:xfrm>
             <a:custGeom>
               <a:avLst/>
               <a:pathLst>
-                <a:path w="7090630" h="355805">
+                <a:path w="7090630" h="355332">
                   <a:moveTo>
                     <a:pt x="0" y="0"/>
                   </a:moveTo>
                   <a:lnTo>
-                    <a:pt x="71622" y="4380"/>
-                  </a:lnTo>
-                  <a:lnTo>
-                    <a:pt x="143245" y="8743"/>
-                  </a:lnTo>
-                  <a:lnTo>
-                    <a:pt x="214867" y="13087"/>
-                  </a:lnTo>
-                  <a:lnTo>
-                    <a:pt x="286490" y="17413"/>
-                  </a:lnTo>
-                  <a:lnTo>
-                    <a:pt x="358112" y="21721"/>
-                  </a:lnTo>
-                  <a:lnTo>
-                    <a:pt x="429735" y="26012"/>
-                  </a:lnTo>
-                  <a:lnTo>
-                    <a:pt x="501357" y="30284"/>
-                  </a:lnTo>
-                  <a:lnTo>
-                    <a:pt x="572980" y="34538"/>
-                  </a:lnTo>
-                  <a:lnTo>
-                    <a:pt x="644602" y="38775"/>
-                  </a:lnTo>
-                  <a:lnTo>
-                    <a:pt x="716225" y="42994"/>
-                  </a:lnTo>
-                  <a:lnTo>
-                    <a:pt x="787847" y="47195"/>
-                  </a:lnTo>
-                  <a:lnTo>
-                    <a:pt x="859470" y="51378"/>
-                  </a:lnTo>
-                  <a:lnTo>
-                    <a:pt x="931092" y="55545"/>
-                  </a:lnTo>
-                  <a:lnTo>
-                    <a:pt x="1002715" y="59694"/>
-                  </a:lnTo>
-                  <a:lnTo>
-                    <a:pt x="1074337" y="63825"/>
-                  </a:lnTo>
-                  <a:lnTo>
-                    <a:pt x="1145960" y="67939"/>
-                  </a:lnTo>
-                  <a:lnTo>
-                    <a:pt x="1217582" y="72036"/>
-                  </a:lnTo>
-                  <a:lnTo>
-                    <a:pt x="1289205" y="76116"/>
-                  </a:lnTo>
-                  <a:lnTo>
-                    <a:pt x="1360827" y="80179"/>
-                  </a:lnTo>
-                  <a:lnTo>
-                    <a:pt x="1432450" y="84225"/>
-                  </a:lnTo>
-                  <a:lnTo>
-                    <a:pt x="1504073" y="88254"/>
-                  </a:lnTo>
-                  <a:lnTo>
-                    <a:pt x="1575695" y="92266"/>
-                  </a:lnTo>
-                  <a:lnTo>
-                    <a:pt x="1647318" y="96262"/>
-                  </a:lnTo>
-                  <a:lnTo>
-                    <a:pt x="1718940" y="100240"/>
-                  </a:lnTo>
-                  <a:lnTo>
-                    <a:pt x="1790563" y="104202"/>
-                  </a:lnTo>
-                  <a:lnTo>
-                    <a:pt x="1862185" y="108148"/>
-                  </a:lnTo>
-                  <a:lnTo>
-                    <a:pt x="1933808" y="112077"/>
-                  </a:lnTo>
-                  <a:lnTo>
-                    <a:pt x="2005430" y="115990"/>
-                  </a:lnTo>
-                  <a:lnTo>
-                    <a:pt x="2077053" y="119886"/>
-                  </a:lnTo>
-                  <a:lnTo>
-                    <a:pt x="2148675" y="123766"/>
-                  </a:lnTo>
-                  <a:lnTo>
-                    <a:pt x="2220298" y="127630"/>
-                  </a:lnTo>
-                  <a:lnTo>
-                    <a:pt x="2291920" y="131477"/>
-                  </a:lnTo>
-                  <a:lnTo>
-                    <a:pt x="2363543" y="135309"/>
-                  </a:lnTo>
-                  <a:lnTo>
-                    <a:pt x="2435165" y="139125"/>
-                  </a:lnTo>
-                  <a:lnTo>
-                    <a:pt x="2506788" y="142924"/>
-                  </a:lnTo>
-                  <a:lnTo>
-                    <a:pt x="2578410" y="146708"/>
-                  </a:lnTo>
-                  <a:lnTo>
-                    <a:pt x="2650033" y="150476"/>
-                  </a:lnTo>
-                  <a:lnTo>
-                    <a:pt x="2721655" y="154228"/>
-                  </a:lnTo>
-                  <a:lnTo>
-                    <a:pt x="2793278" y="157965"/>
-                  </a:lnTo>
-                  <a:lnTo>
-                    <a:pt x="2864901" y="161686"/>
-                  </a:lnTo>
-                  <a:lnTo>
-                    <a:pt x="2936523" y="165391"/>
-                  </a:lnTo>
-                  <a:lnTo>
-                    <a:pt x="3008146" y="169081"/>
-                  </a:lnTo>
-                  <a:lnTo>
-                    <a:pt x="3079768" y="172756"/>
-                  </a:lnTo>
-                  <a:lnTo>
-                    <a:pt x="3151391" y="176415"/>
-                  </a:lnTo>
-                  <a:lnTo>
-                    <a:pt x="3223013" y="180059"/>
-                  </a:lnTo>
-                  <a:lnTo>
-                    <a:pt x="3294636" y="183687"/>
-                  </a:lnTo>
-                  <a:lnTo>
-                    <a:pt x="3366258" y="187301"/>
-                  </a:lnTo>
-                  <a:lnTo>
-                    <a:pt x="3437881" y="190899"/>
-                  </a:lnTo>
-                  <a:lnTo>
-                    <a:pt x="3509503" y="194483"/>
-                  </a:lnTo>
-                  <a:lnTo>
-                    <a:pt x="3581126" y="198051"/>
-                  </a:lnTo>
-                  <a:lnTo>
-                    <a:pt x="3652748" y="201605"/>
-                  </a:lnTo>
-                  <a:lnTo>
-                    <a:pt x="3724371" y="205143"/>
-                  </a:lnTo>
-                  <a:lnTo>
-                    <a:pt x="3795993" y="208667"/>
-                  </a:lnTo>
-                  <a:lnTo>
-                    <a:pt x="3867616" y="212176"/>
-                  </a:lnTo>
-                  <a:lnTo>
-                    <a:pt x="3939238" y="215671"/>
-                  </a:lnTo>
-                  <a:lnTo>
-                    <a:pt x="4010861" y="219151"/>
-                  </a:lnTo>
-                  <a:lnTo>
-                    <a:pt x="4082483" y="222616"/>
-                  </a:lnTo>
-                  <a:lnTo>
-                    <a:pt x="4154106" y="226067"/>
-                  </a:lnTo>
-                  <a:lnTo>
-                    <a:pt x="4225729" y="229503"/>
-                  </a:lnTo>
-                  <a:lnTo>
-                    <a:pt x="4297351" y="232926"/>
-                  </a:lnTo>
-                  <a:lnTo>
-                    <a:pt x="4368974" y="236333"/>
-                  </a:lnTo>
-                  <a:lnTo>
-                    <a:pt x="4440596" y="239727"/>
-                  </a:lnTo>
-                  <a:lnTo>
-                    <a:pt x="4512219" y="243106"/>
-                  </a:lnTo>
-                  <a:lnTo>
-                    <a:pt x="4583841" y="246472"/>
-                  </a:lnTo>
-                  <a:lnTo>
-                    <a:pt x="4655464" y="249823"/>
-                  </a:lnTo>
-                  <a:lnTo>
-                    <a:pt x="4727086" y="253160"/>
-                  </a:lnTo>
-                  <a:lnTo>
-                    <a:pt x="4798709" y="256483"/>
-                  </a:lnTo>
-                  <a:lnTo>
-                    <a:pt x="4870331" y="259793"/>
-                  </a:lnTo>
-                  <a:lnTo>
-                    <a:pt x="4941954" y="263088"/>
-                  </a:lnTo>
-                  <a:lnTo>
-                    <a:pt x="5013576" y="266370"/>
-                  </a:lnTo>
-                  <a:lnTo>
-                    <a:pt x="5085199" y="269638"/>
-                  </a:lnTo>
-                  <a:lnTo>
-                    <a:pt x="5156821" y="272893"/>
-                  </a:lnTo>
-                  <a:lnTo>
-                    <a:pt x="5228444" y="276134"/>
-                  </a:lnTo>
-                  <a:lnTo>
-                    <a:pt x="5300066" y="279361"/>
-                  </a:lnTo>
-                  <a:lnTo>
-                    <a:pt x="5371689" y="282575"/>
-                  </a:lnTo>
-                  <a:lnTo>
-                    <a:pt x="5443311" y="285775"/>
-                  </a:lnTo>
-                  <a:lnTo>
-                    <a:pt x="5514934" y="288962"/>
-                  </a:lnTo>
-                  <a:lnTo>
-                    <a:pt x="5586557" y="292136"/>
-                  </a:lnTo>
-                  <a:lnTo>
-                    <a:pt x="5658179" y="295296"/>
-                  </a:lnTo>
-                  <a:lnTo>
-                    <a:pt x="5729802" y="298444"/>
-                  </a:lnTo>
-                  <a:lnTo>
-                    <a:pt x="5801424" y="301578"/>
-                  </a:lnTo>
-                  <a:lnTo>
-                    <a:pt x="5873047" y="304699"/>
-                  </a:lnTo>
-                  <a:lnTo>
-                    <a:pt x="5944669" y="307807"/>
-                  </a:lnTo>
-                  <a:lnTo>
-                    <a:pt x="6016292" y="310902"/>
-                  </a:lnTo>
-                  <a:lnTo>
-                    <a:pt x="6087914" y="313984"/>
-                  </a:lnTo>
-                  <a:lnTo>
-                    <a:pt x="6159537" y="317053"/>
-                  </a:lnTo>
-                  <a:lnTo>
-                    <a:pt x="6231159" y="320109"/>
-                  </a:lnTo>
-                  <a:lnTo>
-                    <a:pt x="6302782" y="323153"/>
-                  </a:lnTo>
-                  <a:lnTo>
-                    <a:pt x="6374404" y="326184"/>
-                  </a:lnTo>
-                  <a:lnTo>
-                    <a:pt x="6446027" y="329202"/>
-                  </a:lnTo>
-                  <a:lnTo>
-                    <a:pt x="6517649" y="332208"/>
-                  </a:lnTo>
-                  <a:lnTo>
-                    <a:pt x="6589272" y="335201"/>
-                  </a:lnTo>
-                  <a:lnTo>
-                    <a:pt x="6660894" y="338181"/>
-                  </a:lnTo>
-                  <a:lnTo>
-                    <a:pt x="6732517" y="341150"/>
-                  </a:lnTo>
-                  <a:lnTo>
-                    <a:pt x="6804139" y="344105"/>
-                  </a:lnTo>
-                  <a:lnTo>
-                    <a:pt x="6875762" y="347049"/>
-                  </a:lnTo>
-                  <a:lnTo>
-                    <a:pt x="6947385" y="349980"/>
-                  </a:lnTo>
-                  <a:lnTo>
-                    <a:pt x="7019007" y="352899"/>
-                  </a:lnTo>
-                  <a:lnTo>
-                    <a:pt x="7090630" y="355805"/>
+                    <a:pt x="71622" y="4375"/>
+                  </a:lnTo>
+                  <a:lnTo>
+                    <a:pt x="143245" y="8733"/>
+                  </a:lnTo>
+                  <a:lnTo>
+                    <a:pt x="214867" y="13072"/>
+                  </a:lnTo>
+                  <a:lnTo>
+                    <a:pt x="286490" y="17394"/>
+                  </a:lnTo>
+                  <a:lnTo>
+                    <a:pt x="358112" y="21697"/>
+                  </a:lnTo>
+                  <a:lnTo>
+                    <a:pt x="429735" y="25982"/>
+                  </a:lnTo>
+                  <a:lnTo>
+                    <a:pt x="501357" y="30249"/>
+                  </a:lnTo>
+                  <a:lnTo>
+                    <a:pt x="572980" y="34499"/>
+                  </a:lnTo>
+                  <a:lnTo>
+                    <a:pt x="644602" y="38730"/>
+                  </a:lnTo>
+                  <a:lnTo>
+                    <a:pt x="716225" y="42944"/>
+                  </a:lnTo>
+                  <a:lnTo>
+                    <a:pt x="787847" y="47140"/>
+                  </a:lnTo>
+                  <a:lnTo>
+                    <a:pt x="859470" y="51319"/>
+                  </a:lnTo>
+                  <a:lnTo>
+                    <a:pt x="931092" y="55480"/>
+                  </a:lnTo>
+                  <a:lnTo>
+                    <a:pt x="1002715" y="59624"/>
+                  </a:lnTo>
+                  <a:lnTo>
+                    <a:pt x="1074337" y="63751"/>
+                  </a:lnTo>
+                  <a:lnTo>
+                    <a:pt x="1145960" y="67860"/>
+                  </a:lnTo>
+                  <a:lnTo>
+                    <a:pt x="1217582" y="71952"/>
+                  </a:lnTo>
+                  <a:lnTo>
+                    <a:pt x="1289205" y="76027"/>
+                  </a:lnTo>
+                  <a:lnTo>
+                    <a:pt x="1360827" y="80085"/>
+                  </a:lnTo>
+                  <a:lnTo>
+                    <a:pt x="1432450" y="84126"/>
+                  </a:lnTo>
+                  <a:lnTo>
+                    <a:pt x="1504073" y="88150"/>
+                  </a:lnTo>
+                  <a:lnTo>
+                    <a:pt x="1575695" y="92158"/>
+                  </a:lnTo>
+                  <a:lnTo>
+                    <a:pt x="1647318" y="96148"/>
+                  </a:lnTo>
+                  <a:lnTo>
+                    <a:pt x="1718940" y="100122"/>
+                  </a:lnTo>
+                  <a:lnTo>
+                    <a:pt x="1790563" y="104079"/>
+                  </a:lnTo>
+                  <a:lnTo>
+                    <a:pt x="1862185" y="108020"/>
+                  </a:lnTo>
+                  <a:lnTo>
+                    <a:pt x="1933808" y="111944"/>
+                  </a:lnTo>
+                  <a:lnTo>
+                    <a:pt x="2005430" y="115852"/>
+                  </a:lnTo>
+                  <a:lnTo>
+                    <a:pt x="2077053" y="119743"/>
+                  </a:lnTo>
+                  <a:lnTo>
+                    <a:pt x="2148675" y="123618"/>
+                  </a:lnTo>
+                  <a:lnTo>
+                    <a:pt x="2220298" y="127477"/>
+                  </a:lnTo>
+                  <a:lnTo>
+                    <a:pt x="2291920" y="131320"/>
+                  </a:lnTo>
+                  <a:lnTo>
+                    <a:pt x="2363543" y="135147"/>
+                  </a:lnTo>
+                  <a:lnTo>
+                    <a:pt x="2435165" y="138958"/>
+                  </a:lnTo>
+                  <a:lnTo>
+                    <a:pt x="2506788" y="142752"/>
+                  </a:lnTo>
+                  <a:lnTo>
+                    <a:pt x="2578410" y="146531"/>
+                  </a:lnTo>
+                  <a:lnTo>
+                    <a:pt x="2650033" y="150295"/>
+                  </a:lnTo>
+                  <a:lnTo>
+                    <a:pt x="2721655" y="154042"/>
+                  </a:lnTo>
+                  <a:lnTo>
+                    <a:pt x="2793278" y="157774"/>
+                  </a:lnTo>
+                  <a:lnTo>
+                    <a:pt x="2864901" y="161490"/>
+                  </a:lnTo>
+                  <a:lnTo>
+                    <a:pt x="2936523" y="165190"/>
+                  </a:lnTo>
+                  <a:lnTo>
+                    <a:pt x="3008146" y="168875"/>
+                  </a:lnTo>
+                  <a:lnTo>
+                    <a:pt x="3079768" y="172545"/>
+                  </a:lnTo>
+                  <a:lnTo>
+                    <a:pt x="3151391" y="176199"/>
+                  </a:lnTo>
+                  <a:lnTo>
+                    <a:pt x="3223013" y="179839"/>
+                  </a:lnTo>
+                  <a:lnTo>
+                    <a:pt x="3294636" y="183462"/>
+                  </a:lnTo>
+                  <a:lnTo>
+                    <a:pt x="3366258" y="187071"/>
+                  </a:lnTo>
+                  <a:lnTo>
+                    <a:pt x="3437881" y="190665"/>
+                  </a:lnTo>
+                  <a:lnTo>
+                    <a:pt x="3509503" y="194243"/>
+                  </a:lnTo>
+                  <a:lnTo>
+                    <a:pt x="3581126" y="197807"/>
+                  </a:lnTo>
+                  <a:lnTo>
+                    <a:pt x="3652748" y="201356"/>
+                  </a:lnTo>
+                  <a:lnTo>
+                    <a:pt x="3724371" y="204889"/>
+                  </a:lnTo>
+                  <a:lnTo>
+                    <a:pt x="3795993" y="208409"/>
+                  </a:lnTo>
+                  <a:lnTo>
+                    <a:pt x="3867616" y="211913"/>
+                  </a:lnTo>
+                  <a:lnTo>
+                    <a:pt x="3939238" y="215403"/>
+                  </a:lnTo>
+                  <a:lnTo>
+                    <a:pt x="4010861" y="218878"/>
+                  </a:lnTo>
+                  <a:lnTo>
+                    <a:pt x="4082483" y="222338"/>
+                  </a:lnTo>
+                  <a:lnTo>
+                    <a:pt x="4154106" y="225784"/>
+                  </a:lnTo>
+                  <a:lnTo>
+                    <a:pt x="4225729" y="229216"/>
+                  </a:lnTo>
+                  <a:lnTo>
+                    <a:pt x="4297351" y="232634"/>
+                  </a:lnTo>
+                  <a:lnTo>
+                    <a:pt x="4368974" y="236037"/>
+                  </a:lnTo>
+                  <a:lnTo>
+                    <a:pt x="4440596" y="239425"/>
+                  </a:lnTo>
+                  <a:lnTo>
+                    <a:pt x="4512219" y="242800"/>
+                  </a:lnTo>
+                  <a:lnTo>
+                    <a:pt x="4583841" y="246161"/>
+                  </a:lnTo>
+                  <a:lnTo>
+                    <a:pt x="4655464" y="249507"/>
+                  </a:lnTo>
+                  <a:lnTo>
+                    <a:pt x="4727086" y="252840"/>
+                  </a:lnTo>
+                  <a:lnTo>
+                    <a:pt x="4798709" y="256158"/>
+                  </a:lnTo>
+                  <a:lnTo>
+                    <a:pt x="4870331" y="259463"/>
+                  </a:lnTo>
+                  <a:lnTo>
+                    <a:pt x="4941954" y="262754"/>
+                  </a:lnTo>
+                  <a:lnTo>
+                    <a:pt x="5013576" y="266031"/>
+                  </a:lnTo>
+                  <a:lnTo>
+                    <a:pt x="5085199" y="269294"/>
+                  </a:lnTo>
+                  <a:lnTo>
+                    <a:pt x="5156821" y="272544"/>
+                  </a:lnTo>
+                  <a:lnTo>
+                    <a:pt x="5228444" y="275780"/>
+                  </a:lnTo>
+                  <a:lnTo>
+                    <a:pt x="5300066" y="279003"/>
+                  </a:lnTo>
+                  <a:lnTo>
+                    <a:pt x="5371689" y="282212"/>
+                  </a:lnTo>
+                  <a:lnTo>
+                    <a:pt x="5443311" y="285408"/>
+                  </a:lnTo>
+                  <a:lnTo>
+                    <a:pt x="5514934" y="288590"/>
+                  </a:lnTo>
+                  <a:lnTo>
+                    <a:pt x="5586557" y="291759"/>
+                  </a:lnTo>
+                  <a:lnTo>
+                    <a:pt x="5658179" y="294915"/>
+                  </a:lnTo>
+                  <a:lnTo>
+                    <a:pt x="5729802" y="298058"/>
+                  </a:lnTo>
+                  <a:lnTo>
+                    <a:pt x="5801424" y="301187"/>
+                  </a:lnTo>
+                  <a:lnTo>
+                    <a:pt x="5873047" y="304304"/>
+                  </a:lnTo>
+                  <a:lnTo>
+                    <a:pt x="5944669" y="307407"/>
+                  </a:lnTo>
+                  <a:lnTo>
+                    <a:pt x="6016292" y="310497"/>
+                  </a:lnTo>
+                  <a:lnTo>
+                    <a:pt x="6087914" y="313575"/>
+                  </a:lnTo>
+                  <a:lnTo>
+                    <a:pt x="6159537" y="316639"/>
+                  </a:lnTo>
+                  <a:lnTo>
+                    <a:pt x="6231159" y="319691"/>
+                  </a:lnTo>
+                  <a:lnTo>
+                    <a:pt x="6302782" y="322730"/>
+                  </a:lnTo>
+                  <a:lnTo>
+                    <a:pt x="6374404" y="325756"/>
+                  </a:lnTo>
+                  <a:lnTo>
+                    <a:pt x="6446027" y="328770"/>
+                  </a:lnTo>
+                  <a:lnTo>
+                    <a:pt x="6517649" y="331771"/>
+                  </a:lnTo>
+                  <a:lnTo>
+                    <a:pt x="6589272" y="334760"/>
+                  </a:lnTo>
+                  <a:lnTo>
+                    <a:pt x="6660894" y="337736"/>
+                  </a:lnTo>
+                  <a:lnTo>
+                    <a:pt x="6732517" y="340699"/>
+                  </a:lnTo>
+                  <a:lnTo>
+                    <a:pt x="6804139" y="343650"/>
+                  </a:lnTo>
+                  <a:lnTo>
+                    <a:pt x="6875762" y="346589"/>
+                  </a:lnTo>
+                  <a:lnTo>
+                    <a:pt x="6947385" y="349516"/>
+                  </a:lnTo>
+                  <a:lnTo>
+                    <a:pt x="7019007" y="352430"/>
+                  </a:lnTo>
+                  <a:lnTo>
+                    <a:pt x="7090630" y="355332"/>
                   </a:lnTo>
                 </a:path>
               </a:pathLst>
@@ -4476,7 +4470,7 @@
           </p:nvSpPr>
           <p:spPr>
             <a:xfrm>
-              <a:off x="4374536" y="1896563"/>
+              <a:off x="4334057" y="1896563"/>
               <a:ext cx="0" cy="3826579"/>
             </a:xfrm>
             <a:custGeom>
@@ -4749,7 +4743,7 @@
           </p:nvSpPr>
           <p:spPr>
             <a:xfrm>
-              <a:off x="2009531" y="5785772"/>
+              <a:off x="2008892" y="5785772"/>
               <a:ext cx="223753" cy="80101"/>
             </a:xfrm>
             <a:prstGeom prst="rect">
@@ -4795,7 +4789,7 @@
           </p:nvSpPr>
           <p:spPr>
             <a:xfrm>
-              <a:off x="4372762" y="5785772"/>
+              <a:off x="4369739" y="5785772"/>
               <a:ext cx="62179" cy="80101"/>
             </a:xfrm>
             <a:prstGeom prst="rect">
@@ -4841,7 +4835,7 @@
           </p:nvSpPr>
           <p:spPr>
             <a:xfrm>
-              <a:off x="6593026" y="5785772"/>
+              <a:off x="6587619" y="5785772"/>
               <a:ext cx="186537" cy="80101"/>
             </a:xfrm>
             <a:prstGeom prst="rect">
